--- a/10-Knowledge-Products/KP1-GEA/videos/module_2/en/decks/KP1_M2_2.4_Deck_v0.2.pptx
+++ b/10-Knowledge-Products/KP1-GEA/videos/module_2/en/decks/KP1_M2_2.4_Deck_v0.2.pptx
@@ -14,14 +14,14 @@
     <p:handoutMasterId r:id="rId47"/>
   </p:handoutMasterIdLst>
   <p:sldIdLst>
-    <p:sldId id="2681" r:id="rId8"/>
-    <p:sldId id="2718" r:id="rId40"/>
-    <p:sldId id="2719" r:id="rId41"/>
-    <p:sldId id="2720" r:id="rId42"/>
     <p:sldId id="2721" r:id="rId43"/>
     <p:sldId id="2722" r:id="rId44"/>
     <p:sldId id="2723" r:id="rId45"/>
     <p:sldId id="2724" r:id="rId17"/>
+    <p:sldId id="2725" r:id="rId16"/>
+    <p:sldId id="2726" r:id="rId15"/>
+    <p:sldId id="2727" r:id="rId14"/>
+    <p:sldId id="2728" r:id="rId13"/>
   </p:sldIdLst>
   <p:sldSz cx="12192000" cy="6858000"/>
   <p:notesSz cx="6858000" cy="9144000"/>
@@ -888,286 +888,6 @@
 </p:notesMaster>
 </file>
 
-<file path=ppt/notesSlides/notesSlide21.xml><?xml version="1.0" encoding="utf-8"?>
-<p:notes xmlns:a="http://schemas.openxmlformats.org/drawingml/2006/main" xmlns:p="http://schemas.openxmlformats.org/presentationml/2006/main" xmlns:r="http://schemas.openxmlformats.org/officeDocument/2006/relationships">
-  <p:cSld>
-    <p:spTree>
-      <p:nvGrpSpPr>
-        <p:cNvPr id="1" name=""/>
-        <p:cNvGrpSpPr/>
-        <p:nvPr/>
-      </p:nvGrpSpPr>
-      <p:grpSpPr>
-        <a:xfrm>
-          <a:off x="0" y="0"/>
-          <a:ext cx="0" cy="0"/>
-          <a:chOff x="0" y="0"/>
-          <a:chExt cx="0" cy="0"/>
-        </a:xfrm>
-      </p:grpSpPr>
-      <p:sp>
-        <p:nvSpPr>
-          <p:cNvPr id="2" name="Slide Image Placeholder 1"/>
-          <p:cNvSpPr>
-            <a:spLocks noGrp="1"/>
-          </p:cNvSpPr>
-          <p:nvPr>
-            <p:ph type="sldImg" idx="2"/>
-          </p:nvPr>
-        </p:nvSpPr>
-        <p:spPr/>
-      </p:sp>
-      <p:sp>
-        <p:nvSpPr>
-          <p:cNvPr id="3" name="Notes Placeholder 2"/>
-          <p:cNvSpPr>
-            <a:spLocks noGrp="1"/>
-          </p:cNvSpPr>
-          <p:nvPr>
-            <p:ph type="body" idx="3" sz="quarter"/>
-          </p:nvPr>
-        </p:nvSpPr>
-        <p:spPr/>
-        <p:txBody>
-          <a:bodyPr/>
-          <a:lstStyle/>
-          <a:p>
-            <a:r>
-              <a:t>Title card for standalone video 2.4. Content slides are identical to the corresponding section of the combined deck KP1_M2_Deck_v0.2.pptx; voice-over is in each slide’s notes.</a:t>
-            </a:r>
-          </a:p>
-        </p:txBody>
-      </p:sp>
-      <p:sp>
-        <p:nvSpPr>
-          <p:cNvPr id="4" name="Slide Number Placeholder 3"/>
-          <p:cNvSpPr>
-            <a:spLocks noGrp="1"/>
-          </p:cNvSpPr>
-          <p:nvPr>
-            <p:ph type="sldNum" idx="5" sz="quarter"/>
-          </p:nvPr>
-        </p:nvSpPr>
-        <p:spPr/>
-      </p:sp>
-    </p:spTree>
-  </p:cSld>
-  <p:clrMapOvr>
-    <a:masterClrMapping/>
-  </p:clrMapOvr>
-</p:notes>
-</file>
-
-<file path=ppt/notesSlides/notesSlide25.xml><?xml version="1.0" encoding="utf-8"?>
-<p:notes xmlns:a="http://schemas.openxmlformats.org/drawingml/2006/main" xmlns:p="http://schemas.openxmlformats.org/presentationml/2006/main" xmlns:r="http://schemas.openxmlformats.org/officeDocument/2006/relationships">
-  <p:cSld>
-    <p:spTree>
-      <p:nvGrpSpPr>
-        <p:cNvPr id="1" name=""/>
-        <p:cNvGrpSpPr/>
-        <p:nvPr/>
-      </p:nvGrpSpPr>
-      <p:grpSpPr>
-        <a:xfrm>
-          <a:off x="0" y="0"/>
-          <a:ext cx="0" cy="0"/>
-          <a:chOff x="0" y="0"/>
-          <a:chExt cx="0" cy="0"/>
-        </a:xfrm>
-      </p:grpSpPr>
-      <p:sp>
-        <p:nvSpPr>
-          <p:cNvPr id="2" name="Slide Image Placeholder 1"/>
-          <p:cNvSpPr>
-            <a:spLocks noGrp="1"/>
-          </p:cNvSpPr>
-          <p:nvPr>
-            <p:ph type="sldImg" idx="2"/>
-          </p:nvPr>
-        </p:nvSpPr>
-        <p:spPr/>
-      </p:sp>
-      <p:sp>
-        <p:nvSpPr>
-          <p:cNvPr id="3" name="Notes Placeholder 2"/>
-          <p:cNvSpPr>
-            <a:spLocks noGrp="1"/>
-          </p:cNvSpPr>
-          <p:nvPr>
-            <p:ph type="body" idx="3" sz="quarter"/>
-          </p:nvPr>
-        </p:nvSpPr>
-        <p:spPr/>
-        <p:txBody>
-          <a:bodyPr/>
-          <a:lstStyle/>
-          <a:p>
-            <a:r>
-              <a:t>VO, slide 1: Before you model a government body, know what kind of body it is — because the kind tells you in advance what it does, what data it owns, and how it is governed. PAERA publishes a taxonomy that sorts public bodies into a few types.</a:t>
-            </a:r>
-          </a:p>
-        </p:txBody>
-      </p:sp>
-      <p:sp>
-        <p:nvSpPr>
-          <p:cNvPr id="4" name="Slide Number Placeholder 3"/>
-          <p:cNvSpPr>
-            <a:spLocks noGrp="1"/>
-          </p:cNvSpPr>
-          <p:nvPr>
-            <p:ph type="sldNum" idx="5" sz="quarter"/>
-          </p:nvPr>
-        </p:nvSpPr>
-        <p:spPr/>
-      </p:sp>
-    </p:spTree>
-  </p:cSld>
-  <p:clrMapOvr>
-    <a:masterClrMapping/>
-  </p:clrMapOvr>
-</p:notes>
-</file>
-
-<file path=ppt/notesSlides/notesSlide26.xml><?xml version="1.0" encoding="utf-8"?>
-<p:notes xmlns:a="http://schemas.openxmlformats.org/drawingml/2006/main" xmlns:p="http://schemas.openxmlformats.org/presentationml/2006/main" xmlns:r="http://schemas.openxmlformats.org/officeDocument/2006/relationships">
-  <p:cSld>
-    <p:spTree>
-      <p:nvGrpSpPr>
-        <p:cNvPr id="1" name=""/>
-        <p:cNvGrpSpPr/>
-        <p:nvPr/>
-      </p:nvGrpSpPr>
-      <p:grpSpPr>
-        <a:xfrm>
-          <a:off x="0" y="0"/>
-          <a:ext cx="0" cy="0"/>
-          <a:chOff x="0" y="0"/>
-          <a:chExt cx="0" cy="0"/>
-        </a:xfrm>
-      </p:grpSpPr>
-      <p:sp>
-        <p:nvSpPr>
-          <p:cNvPr id="2" name="Slide Image Placeholder 1"/>
-          <p:cNvSpPr>
-            <a:spLocks noGrp="1"/>
-          </p:cNvSpPr>
-          <p:nvPr>
-            <p:ph type="sldImg" idx="2"/>
-          </p:nvPr>
-        </p:nvSpPr>
-        <p:spPr/>
-      </p:sp>
-      <p:sp>
-        <p:nvSpPr>
-          <p:cNvPr id="3" name="Notes Placeholder 2"/>
-          <p:cNvSpPr>
-            <a:spLocks noGrp="1"/>
-          </p:cNvSpPr>
-          <p:nvPr>
-            <p:ph type="body" idx="3" sz="quarter"/>
-          </p:nvPr>
-        </p:nvSpPr>
-        <p:spPr/>
-        <p:txBody>
-          <a:bodyPr/>
-          <a:lstStyle/>
-          <a:p>
-            <a:r>
-              <a:t>VO: Three main types cover most of government. A policy unit — usually a ministry's core — sets policy and owns the rules. It does not run services at scale; it decides what the services should be. A regulatory agency licenses, supervises and enforces. It holds registers of the things it regulates and records of its decisions. A service-delivery authority runs services to citizens at scale — it has the queues, the case files, the front-line systems. Tell me which of the three a body is, and I can already guess its main capabilities and its main data domains before I meet anyone.</a:t>
-            </a:r>
-          </a:p>
-        </p:txBody>
-      </p:sp>
-      <p:sp>
-        <p:nvSpPr>
-          <p:cNvPr id="4" name="Slide Number Placeholder 3"/>
-          <p:cNvSpPr>
-            <a:spLocks noGrp="1"/>
-          </p:cNvSpPr>
-          <p:nvPr>
-            <p:ph type="sldNum" idx="5" sz="quarter"/>
-          </p:nvPr>
-        </p:nvSpPr>
-        <p:spPr/>
-      </p:sp>
-    </p:spTree>
-  </p:cSld>
-  <p:clrMapOvr>
-    <a:masterClrMapping/>
-  </p:clrMapOvr>
-</p:notes>
-</file>
-
-<file path=ppt/notesSlides/notesSlide27.xml><?xml version="1.0" encoding="utf-8"?>
-<p:notes xmlns:a="http://schemas.openxmlformats.org/drawingml/2006/main" xmlns:p="http://schemas.openxmlformats.org/presentationml/2006/main" xmlns:r="http://schemas.openxmlformats.org/officeDocument/2006/relationships">
-  <p:cSld>
-    <p:spTree>
-      <p:nvGrpSpPr>
-        <p:cNvPr id="1" name=""/>
-        <p:cNvGrpSpPr/>
-        <p:nvPr/>
-      </p:nvGrpSpPr>
-      <p:grpSpPr>
-        <a:xfrm>
-          <a:off x="0" y="0"/>
-          <a:ext cx="0" cy="0"/>
-          <a:chOff x="0" y="0"/>
-          <a:chExt cx="0" cy="0"/>
-        </a:xfrm>
-      </p:grpSpPr>
-      <p:sp>
-        <p:nvSpPr>
-          <p:cNvPr id="2" name="Slide Image Placeholder 1"/>
-          <p:cNvSpPr>
-            <a:spLocks noGrp="1"/>
-          </p:cNvSpPr>
-          <p:nvPr>
-            <p:ph type="sldImg" idx="2"/>
-          </p:nvPr>
-        </p:nvSpPr>
-        <p:spPr/>
-      </p:sp>
-      <p:sp>
-        <p:nvSpPr>
-          <p:cNvPr id="3" name="Notes Placeholder 2"/>
-          <p:cNvSpPr>
-            <a:spLocks noGrp="1"/>
-          </p:cNvSpPr>
-          <p:nvPr>
-            <p:ph type="body" idx="3" sz="quarter"/>
-          </p:nvPr>
-        </p:nvSpPr>
-        <p:spPr/>
-        <p:txBody>
-          <a:bodyPr/>
-          <a:lstStyle/>
-          <a:p>
-            <a:r>
-              <a:t>VO: Around those three sit the supporting elements. State registries — the authoritative single source of truth for a kind of thing: the population register, the business register, the land register, the learner registry. A registry's whole job is to be the one place the truth lives. And shared platforms — identity, payments, data exchange — used across many bodies. These are not policy units or regulators or service authorities. They are the foundations the others stand on. The taxonomy names them so you treat them as shared, not as the private property of whichever ministry happens to host them.</a:t>
-            </a:r>
-          </a:p>
-        </p:txBody>
-      </p:sp>
-      <p:sp>
-        <p:nvSpPr>
-          <p:cNvPr id="4" name="Slide Number Placeholder 3"/>
-          <p:cNvSpPr>
-            <a:spLocks noGrp="1"/>
-          </p:cNvSpPr>
-          <p:nvPr>
-            <p:ph type="sldNum" idx="5" sz="quarter"/>
-          </p:nvPr>
-        </p:nvSpPr>
-        <p:spPr/>
-      </p:sp>
-    </p:spTree>
-  </p:cSld>
-  <p:clrMapOvr>
-    <a:masterClrMapping/>
-  </p:clrMapOvr>
-</p:notes>
-</file>
-
 <file path=ppt/notesSlides/notesSlide28.xml><?xml version="1.0" encoding="utf-8"?>
 <p:notes xmlns:a="http://schemas.openxmlformats.org/drawingml/2006/main" xmlns:p="http://schemas.openxmlformats.org/presentationml/2006/main" xmlns:r="http://schemas.openxmlformats.org/officeDocument/2006/relationships">
   <p:cSld>
@@ -1213,7 +933,7 @@
           <a:lstStyle/>
           <a:p>
             <a:r>
-              <a:t>VO: Why does classifying first save you time? Because each type comes with an expected profile. Name a body a regulatory agency, and you expect a licensing capability, a register of the regulated, an enforcement record, and an appeals process. You walk in looking for those, and you spend the interview confirming or correcting a profile — not building one from nothing. Misclassification is itself a finding. When a body that should be a neutral registry is acting like a policy unit and shaping rules to suit itself, the taxonomy is what lets you see it. Classification is not bureaucracy. It is the architect's fastest way to orient.</a:t>
+              <a:t>Title card — the cold open. The hosts name the module, the video number, the title and the single message on this slide; no scripted narration. Hold until the opener begins; the opener is narrated on the next slide.</a:t>
             </a:r>
           </a:p>
         </p:txBody>
@@ -1283,7 +1003,7 @@
           <a:lstStyle/>
           <a:p>
             <a:r>
-              <a:t>VO: Like the metamodel and the principles, the taxonomy is already published — PAERA section 4.6, with the detail in Annex A1.2 — so you adopt it rather than invent one, and extend it only where your country has a body type it genuinely does not cover, because a shared taxonomy means every architect in the country pictures the same thing when you say 'service-delivery authority'.</a:t>
+              <a:t>VO: Before you model a government body, know what kind of body it is — because the kind tells you in advance what it does, what data it owns, and how it is governed. PAERA publishes a taxonomy that sorts public bodies into a few types.</a:t>
             </a:r>
           </a:p>
         </p:txBody>
@@ -1353,13 +1073,7 @@
           <a:lstStyle/>
           <a:p>
             <a:r>
-              <a:t>PRACTICE BOX (on-screen only — never read it, never paraphrase it, never point at it). It replaces the narrated handoff: this video ends on the recap and the Sources slide.</a:t>
-            </a:r>
-          </a:p>
-          <a:p/>
-          <a:p>
-            <a:r>
-              <a:t>VO: Before you model, classify. Policy unit, regulatory agency, service-delivery authority, plus registries and shared platforms. Each type carries an expected profile of capabilities, data and governance — so the interview confirms it instead of starting blank.</a:t>
+              <a:t>VO: Three main types cover most of government. A policy unit — usually a ministry's core — sets policy and owns the rules. It does not run services at scale; it decides what the services should be. A regulatory agency licenses, supervises and enforces. It holds registers of the things it regulates and records of its decisions. A service-delivery authority runs services to citizens at scale — it has the queues, the case files, the front-line systems. Tell me which of the three a body is, and I can already guess its main capabilities and its main data domains before I meet anyone.</a:t>
             </a:r>
           </a:p>
         </p:txBody>
@@ -1385,6 +1099,292 @@
 </file>
 
 <file path=ppt/notesSlides/notesSlide31.xml><?xml version="1.0" encoding="utf-8"?>
+<p:notes xmlns:a="http://schemas.openxmlformats.org/drawingml/2006/main" xmlns:p="http://schemas.openxmlformats.org/presentationml/2006/main" xmlns:r="http://schemas.openxmlformats.org/officeDocument/2006/relationships">
+  <p:cSld>
+    <p:spTree>
+      <p:nvGrpSpPr>
+        <p:cNvPr id="1" name=""/>
+        <p:cNvGrpSpPr/>
+        <p:nvPr/>
+      </p:nvGrpSpPr>
+      <p:grpSpPr>
+        <a:xfrm>
+          <a:off x="0" y="0"/>
+          <a:ext cx="0" cy="0"/>
+          <a:chOff x="0" y="0"/>
+          <a:chExt cx="0" cy="0"/>
+        </a:xfrm>
+      </p:grpSpPr>
+      <p:sp>
+        <p:nvSpPr>
+          <p:cNvPr id="2" name="Slide Image Placeholder 1"/>
+          <p:cNvSpPr>
+            <a:spLocks noGrp="1"/>
+          </p:cNvSpPr>
+          <p:nvPr>
+            <p:ph type="sldImg" idx="2"/>
+          </p:nvPr>
+        </p:nvSpPr>
+        <p:spPr/>
+      </p:sp>
+      <p:sp>
+        <p:nvSpPr>
+          <p:cNvPr id="3" name="Notes Placeholder 2"/>
+          <p:cNvSpPr>
+            <a:spLocks noGrp="1"/>
+          </p:cNvSpPr>
+          <p:nvPr>
+            <p:ph type="body" idx="3" sz="quarter"/>
+          </p:nvPr>
+        </p:nvSpPr>
+        <p:spPr/>
+        <p:txBody>
+          <a:bodyPr/>
+          <a:lstStyle/>
+          <a:p>
+            <a:r>
+              <a:t>VO: Around those three sit the supporting elements. State registries — the authoritative single source of truth for a kind of thing: the population register, the business register, the land register, the learner registry. A registry's whole job is to be the one place the truth lives. And shared platforms — identity, payments, data exchange — used across many bodies. These are not policy units or regulators or service authorities. They are the foundations the others stand on. The taxonomy names them so you treat them as shared, not as the private property of whichever ministry happens to host them.</a:t>
+            </a:r>
+          </a:p>
+        </p:txBody>
+      </p:sp>
+      <p:sp>
+        <p:nvSpPr>
+          <p:cNvPr id="4" name="Slide Number Placeholder 3"/>
+          <p:cNvSpPr>
+            <a:spLocks noGrp="1"/>
+          </p:cNvSpPr>
+          <p:nvPr>
+            <p:ph type="sldNum" idx="5" sz="quarter"/>
+          </p:nvPr>
+        </p:nvSpPr>
+        <p:spPr/>
+      </p:sp>
+    </p:spTree>
+  </p:cSld>
+  <p:clrMapOvr>
+    <a:masterClrMapping/>
+  </p:clrMapOvr>
+</p:notes>
+</file>
+
+<file path=ppt/notesSlides/notesSlide32.xml><?xml version="1.0" encoding="utf-8"?>
+<p:notes xmlns:a="http://schemas.openxmlformats.org/drawingml/2006/main" xmlns:p="http://schemas.openxmlformats.org/presentationml/2006/main" xmlns:r="http://schemas.openxmlformats.org/officeDocument/2006/relationships">
+  <p:cSld>
+    <p:spTree>
+      <p:nvGrpSpPr>
+        <p:cNvPr id="1" name=""/>
+        <p:cNvGrpSpPr/>
+        <p:nvPr/>
+      </p:nvGrpSpPr>
+      <p:grpSpPr>
+        <a:xfrm>
+          <a:off x="0" y="0"/>
+          <a:ext cx="0" cy="0"/>
+          <a:chOff x="0" y="0"/>
+          <a:chExt cx="0" cy="0"/>
+        </a:xfrm>
+      </p:grpSpPr>
+      <p:sp>
+        <p:nvSpPr>
+          <p:cNvPr id="2" name="Slide Image Placeholder 1"/>
+          <p:cNvSpPr>
+            <a:spLocks noGrp="1"/>
+          </p:cNvSpPr>
+          <p:nvPr>
+            <p:ph type="sldImg" idx="2"/>
+          </p:nvPr>
+        </p:nvSpPr>
+        <p:spPr/>
+      </p:sp>
+      <p:sp>
+        <p:nvSpPr>
+          <p:cNvPr id="3" name="Notes Placeholder 2"/>
+          <p:cNvSpPr>
+            <a:spLocks noGrp="1"/>
+          </p:cNvSpPr>
+          <p:nvPr>
+            <p:ph type="body" idx="3" sz="quarter"/>
+          </p:nvPr>
+        </p:nvSpPr>
+        <p:spPr/>
+        <p:txBody>
+          <a:bodyPr/>
+          <a:lstStyle/>
+          <a:p>
+            <a:r>
+              <a:t>VO: Why does classifying first save you time? Because each type comes with an expected profile. Name a body a regulatory agency, and you expect a licensing capability, a register of the regulated, an enforcement record, and an appeals process. You walk in looking for those, and you spend the interview confirming or correcting a profile — not building one from nothing. Misclassification is itself a finding. When a body that should be a neutral registry is acting like a policy unit and shaping rules to suit itself, the taxonomy is what lets you see it. Classification is not bureaucracy. It is the architect's fastest way to orient.</a:t>
+            </a:r>
+          </a:p>
+        </p:txBody>
+      </p:sp>
+      <p:sp>
+        <p:nvSpPr>
+          <p:cNvPr id="4" name="Slide Number Placeholder 3"/>
+          <p:cNvSpPr>
+            <a:spLocks noGrp="1"/>
+          </p:cNvSpPr>
+          <p:nvPr>
+            <p:ph type="sldNum" idx="5" sz="quarter"/>
+          </p:nvPr>
+        </p:nvSpPr>
+        <p:spPr/>
+      </p:sp>
+    </p:spTree>
+  </p:cSld>
+  <p:clrMapOvr>
+    <a:masterClrMapping/>
+  </p:clrMapOvr>
+</p:notes>
+</file>
+
+<file path=ppt/notesSlides/notesSlide33.xml><?xml version="1.0" encoding="utf-8"?>
+<p:notes xmlns:a="http://schemas.openxmlformats.org/drawingml/2006/main" xmlns:p="http://schemas.openxmlformats.org/presentationml/2006/main" xmlns:r="http://schemas.openxmlformats.org/officeDocument/2006/relationships">
+  <p:cSld>
+    <p:spTree>
+      <p:nvGrpSpPr>
+        <p:cNvPr id="1" name=""/>
+        <p:cNvGrpSpPr/>
+        <p:nvPr/>
+      </p:nvGrpSpPr>
+      <p:grpSpPr>
+        <a:xfrm>
+          <a:off x="0" y="0"/>
+          <a:ext cx="0" cy="0"/>
+          <a:chOff x="0" y="0"/>
+          <a:chExt cx="0" cy="0"/>
+        </a:xfrm>
+      </p:grpSpPr>
+      <p:sp>
+        <p:nvSpPr>
+          <p:cNvPr id="2" name="Slide Image Placeholder 1"/>
+          <p:cNvSpPr>
+            <a:spLocks noGrp="1"/>
+          </p:cNvSpPr>
+          <p:nvPr>
+            <p:ph type="sldImg" idx="2"/>
+          </p:nvPr>
+        </p:nvSpPr>
+        <p:spPr/>
+      </p:sp>
+      <p:sp>
+        <p:nvSpPr>
+          <p:cNvPr id="3" name="Notes Placeholder 2"/>
+          <p:cNvSpPr>
+            <a:spLocks noGrp="1"/>
+          </p:cNvSpPr>
+          <p:nvPr>
+            <p:ph type="body" idx="3" sz="quarter"/>
+          </p:nvPr>
+        </p:nvSpPr>
+        <p:spPr/>
+        <p:txBody>
+          <a:bodyPr/>
+          <a:lstStyle/>
+          <a:p>
+            <a:r>
+              <a:t>VO: Like the metamodel and the principles, the taxonomy is already published — PAERA section 4.6, with the detail in Annex A1.2 — so you adopt it rather than invent one, and extend it only where your country has a body type it genuinely does not cover, because a shared taxonomy means every architect in the country pictures the same thing when you say 'service-delivery authority'.</a:t>
+            </a:r>
+          </a:p>
+        </p:txBody>
+      </p:sp>
+      <p:sp>
+        <p:nvSpPr>
+          <p:cNvPr id="4" name="Slide Number Placeholder 3"/>
+          <p:cNvSpPr>
+            <a:spLocks noGrp="1"/>
+          </p:cNvSpPr>
+          <p:nvPr>
+            <p:ph type="sldNum" idx="5" sz="quarter"/>
+          </p:nvPr>
+        </p:nvSpPr>
+        <p:spPr/>
+      </p:sp>
+    </p:spTree>
+  </p:cSld>
+  <p:clrMapOvr>
+    <a:masterClrMapping/>
+  </p:clrMapOvr>
+</p:notes>
+</file>
+
+<file path=ppt/notesSlides/notesSlide34.xml><?xml version="1.0" encoding="utf-8"?>
+<p:notes xmlns:a="http://schemas.openxmlformats.org/drawingml/2006/main" xmlns:p="http://schemas.openxmlformats.org/presentationml/2006/main" xmlns:r="http://schemas.openxmlformats.org/officeDocument/2006/relationships">
+  <p:cSld>
+    <p:spTree>
+      <p:nvGrpSpPr>
+        <p:cNvPr id="1" name=""/>
+        <p:cNvGrpSpPr/>
+        <p:nvPr/>
+      </p:nvGrpSpPr>
+      <p:grpSpPr>
+        <a:xfrm>
+          <a:off x="0" y="0"/>
+          <a:ext cx="0" cy="0"/>
+          <a:chOff x="0" y="0"/>
+          <a:chExt cx="0" cy="0"/>
+        </a:xfrm>
+      </p:grpSpPr>
+      <p:sp>
+        <p:nvSpPr>
+          <p:cNvPr id="2" name="Slide Image Placeholder 1"/>
+          <p:cNvSpPr>
+            <a:spLocks noGrp="1"/>
+          </p:cNvSpPr>
+          <p:nvPr>
+            <p:ph type="sldImg" idx="2"/>
+          </p:nvPr>
+        </p:nvSpPr>
+        <p:spPr/>
+      </p:sp>
+      <p:sp>
+        <p:nvSpPr>
+          <p:cNvPr id="3" name="Notes Placeholder 2"/>
+          <p:cNvSpPr>
+            <a:spLocks noGrp="1"/>
+          </p:cNvSpPr>
+          <p:nvPr>
+            <p:ph type="body" idx="3" sz="quarter"/>
+          </p:nvPr>
+        </p:nvSpPr>
+        <p:spPr/>
+        <p:txBody>
+          <a:bodyPr/>
+          <a:lstStyle/>
+          <a:p>
+            <a:r>
+              <a:t>PRACTICE BOX (on-screen only — never read it, never paraphrase it, never point at it). It replaces the narrated handoff: this video ends on the recap and the Sources slide.</a:t>
+            </a:r>
+          </a:p>
+          <a:p/>
+          <a:p>
+            <a:r>
+              <a:t>VO: Before you model, classify. Policy unit, regulatory agency, service-delivery authority, plus registries and shared platforms. Each type carries an expected profile of capabilities, data and governance — so the interview confirms it instead of starting blank.</a:t>
+            </a:r>
+          </a:p>
+        </p:txBody>
+      </p:sp>
+      <p:sp>
+        <p:nvSpPr>
+          <p:cNvPr id="4" name="Slide Number Placeholder 3"/>
+          <p:cNvSpPr>
+            <a:spLocks noGrp="1"/>
+          </p:cNvSpPr>
+          <p:nvPr>
+            <p:ph type="sldNum" idx="5" sz="quarter"/>
+          </p:nvPr>
+        </p:nvSpPr>
+        <p:spPr/>
+      </p:sp>
+    </p:spTree>
+  </p:cSld>
+  <p:clrMapOvr>
+    <a:masterClrMapping/>
+  </p:clrMapOvr>
+</p:notes>
+</file>
+
+<file path=ppt/notesSlides/notesSlide35.xml><?xml version="1.0" encoding="utf-8"?>
 <p:notes xmlns:a="http://schemas.openxmlformats.org/drawingml/2006/main" xmlns:p="http://schemas.openxmlformats.org/presentationml/2006/main" xmlns:r="http://schemas.openxmlformats.org/officeDocument/2006/relationships">
   <p:cSld>
     <p:spTree>
@@ -11590,1844 +11590,6 @@
 </p:sldMaster>
 </file>
 
-<file path=ppt/slides/slide1.xml><?xml version="1.0" encoding="utf-8"?>
-<p:sld xmlns:a="http://schemas.openxmlformats.org/drawingml/2006/main" xmlns:r="http://schemas.openxmlformats.org/officeDocument/2006/relationships" xmlns:p="http://schemas.openxmlformats.org/presentationml/2006/main">
-  <p:cSld>
-    <p:spTree>
-      <p:nvGrpSpPr>
-        <p:cNvPr id="1" name=""/>
-        <p:cNvGrpSpPr/>
-        <p:nvPr/>
-      </p:nvGrpSpPr>
-      <p:grpSpPr>
-        <a:xfrm>
-          <a:off x="0" y="0"/>
-          <a:ext cx="0" cy="0"/>
-          <a:chOff x="0" y="0"/>
-          <a:chExt cx="0" cy="0"/>
-        </a:xfrm>
-      </p:grpSpPr>
-      <p:cxnSp>
-        <p:nvCxnSpPr>
-          <p:cNvPr id="11" name="Straight Connector 10">
-            <a:extLst>
-              <a:ext uri="{FF2B5EF4-FFF2-40B4-BE49-F238E27FC236}">
-                <a16:creationId xmlns:a16="http://schemas.microsoft.com/office/drawing/2014/main" id="{D9AD66F2-F7C0-4D03-9150-D28F17AC561D}"/>
-              </a:ext>
-            </a:extLst>
-          </p:cNvPr>
-          <p:cNvCxnSpPr>
-            <a:cxnSpLocks/>
-          </p:cNvCxnSpPr>
-          <p:nvPr/>
-        </p:nvCxnSpPr>
-        <p:spPr>
-          <a:xfrm>
-            <a:off x="373021" y="2198718"/>
-            <a:ext cx="6843567" cy="0"/>
-          </a:xfrm>
-          <a:prstGeom prst="line">
-            <a:avLst/>
-          </a:prstGeom>
-          <a:ln w="12700">
-            <a:solidFill>
-              <a:srgbClr val="009CD6"/>
-            </a:solidFill>
-          </a:ln>
-        </p:spPr>
-        <p:style>
-          <a:lnRef idx="1">
-            <a:schemeClr val="accent1"/>
-          </a:lnRef>
-          <a:fillRef idx="0">
-            <a:schemeClr val="accent1"/>
-          </a:fillRef>
-          <a:effectRef idx="0">
-            <a:schemeClr val="accent1"/>
-          </a:effectRef>
-          <a:fontRef idx="minor">
-            <a:schemeClr val="tx1"/>
-          </a:fontRef>
-        </p:style>
-      </p:cxnSp>
-      <p:sp>
-        <p:nvSpPr>
-          <p:cNvPr id="12" name="Title 9">
-            <a:extLst>
-              <a:ext uri="{FF2B5EF4-FFF2-40B4-BE49-F238E27FC236}">
-                <a16:creationId xmlns:a16="http://schemas.microsoft.com/office/drawing/2014/main" id="{EEB08032-CE0E-4986-AEDF-A41026C0E8B9}"/>
-              </a:ext>
-            </a:extLst>
-          </p:cNvPr>
-          <p:cNvSpPr txBox="1">
-            <a:spLocks/>
-          </p:cNvSpPr>
-          <p:nvPr/>
-        </p:nvSpPr>
-        <p:spPr>
-          <a:xfrm>
-            <a:off x="237734" y="702833"/>
-            <a:ext cx="6432007" cy="1218817"/>
-          </a:xfrm>
-          <a:prstGeom prst="rect">
-            <a:avLst/>
-          </a:prstGeom>
-        </p:spPr>
-        <p:txBody>
-          <a:bodyPr anchor="b">
-            <a:noAutofit/>
-          </a:bodyPr>
-          <a:lstStyle>
-            <a:lvl1pPr algn="l" defTabSz="914400" rtl="0" eaLnBrk="1" latinLnBrk="0" hangingPunct="1">
-              <a:lnSpc>
-                <a:spcPct val="90000"/>
-              </a:lnSpc>
-              <a:spcBef>
-                <a:spcPct val="0"/>
-              </a:spcBef>
-              <a:buNone/>
-              <a:defRPr sz="4000" kern="1200">
-                <a:solidFill>
-                  <a:schemeClr val="bg1"/>
-                </a:solidFill>
-                <a:latin typeface="Arial" panose="020B0604020202020204" pitchFamily="34" charset="0"/>
-                <a:ea typeface="+mj-ea"/>
-                <a:cs typeface="Arial" panose="020B0604020202020204" pitchFamily="34" charset="0"/>
-              </a:defRPr>
-            </a:lvl1pPr>
-          </a:lstStyle>
-          <a:p>
-            <a:r>
-              <a:rPr sz="2400" b="1" i="0">
-                <a:solidFill>
-                  <a:srgbClr val="1A1A1A"/>
-                </a:solidFill>
-                <a:latin typeface="Arial"/>
-              </a:rPr>
-              <a:t>2.4 — Classify any public body before you model it</a:t>
-            </a:r>
-          </a:p>
-        </p:txBody>
-      </p:sp>
-      <p:pic>
-        <p:nvPicPr>
-          <p:cNvPr id="7" name="Picture 6">
-            <a:extLst>
-              <a:ext uri="{FF2B5EF4-FFF2-40B4-BE49-F238E27FC236}">
-                <a16:creationId xmlns:a16="http://schemas.microsoft.com/office/drawing/2014/main" id="{A2066351-C569-4C4C-A096-308777FCDC32}"/>
-              </a:ext>
-            </a:extLst>
-          </p:cNvPr>
-          <p:cNvPicPr>
-            <a:picLocks noChangeAspect="1"/>
-          </p:cNvPicPr>
-          <p:nvPr/>
-        </p:nvPicPr>
-        <p:blipFill>
-          <a:blip r:embed="rId2">
-            <a:extLst>
-              <a:ext uri="{28A0092B-C50C-407E-A947-70E740481C1C}">
-                <a14:useLocalDpi xmlns:a14="http://schemas.microsoft.com/office/drawing/2010/main" val="0"/>
-              </a:ext>
-            </a:extLst>
-          </a:blip>
-          <a:srcRect t="20219" b="14729"/>
-          <a:stretch>
-            <a:fillRect/>
-          </a:stretch>
-        </p:blipFill>
-        <p:spPr>
-          <a:xfrm>
-            <a:off x="0" y="5620871"/>
-            <a:ext cx="1323975" cy="1218816"/>
-          </a:xfrm>
-          <a:prstGeom prst="rect">
-            <a:avLst/>
-          </a:prstGeom>
-        </p:spPr>
-      </p:pic>
-      <p:sp>
-        <p:nvSpPr>
-          <p:cNvPr id="14" name="Title 9">
-            <a:extLst>
-              <a:ext uri="{FF2B5EF4-FFF2-40B4-BE49-F238E27FC236}">
-                <a16:creationId xmlns:a16="http://schemas.microsoft.com/office/drawing/2014/main" id="{B5087B80-3EE4-1881-0130-ED58CA625092}"/>
-              </a:ext>
-            </a:extLst>
-          </p:cNvPr>
-          <p:cNvSpPr txBox="1">
-            <a:spLocks/>
-          </p:cNvSpPr>
-          <p:nvPr/>
-        </p:nvSpPr>
-        <p:spPr>
-          <a:xfrm>
-            <a:off x="284452" y="2475786"/>
-            <a:ext cx="6382893" cy="953213"/>
-          </a:xfrm>
-          <a:prstGeom prst="rect">
-            <a:avLst/>
-          </a:prstGeom>
-        </p:spPr>
-        <p:txBody>
-          <a:bodyPr anchor="t">
-            <a:noAutofit/>
-          </a:bodyPr>
-          <a:lstStyle>
-            <a:lvl1pPr algn="l" defTabSz="914400" rtl="0" eaLnBrk="1" latinLnBrk="0" hangingPunct="1">
-              <a:lnSpc>
-                <a:spcPct val="90000"/>
-              </a:lnSpc>
-              <a:spcBef>
-                <a:spcPct val="0"/>
-              </a:spcBef>
-              <a:buNone/>
-              <a:defRPr sz="4000" kern="1200">
-                <a:solidFill>
-                  <a:schemeClr val="bg1"/>
-                </a:solidFill>
-                <a:latin typeface="Arial" panose="020B0604020202020204" pitchFamily="34" charset="0"/>
-                <a:ea typeface="+mj-ea"/>
-                <a:cs typeface="Arial" panose="020B0604020202020204" pitchFamily="34" charset="0"/>
-              </a:defRPr>
-            </a:lvl1pPr>
-          </a:lstStyle>
-          <a:p>
-            <a:pPr marL="0" marR="0" lvl="0" indent="0" rtl="0">
-              <a:spcBef>
-                <a:spcPts val="600"/>
-              </a:spcBef>
-              <a:spcAft>
-                <a:spcPts val="0"/>
-              </a:spcAft>
-              <a:buNone/>
-            </a:pPr>
-            <a:r>
-              <a:rPr sz="1300" b="1" i="0">
-                <a:solidFill>
-                  <a:srgbClr val="006E96"/>
-                </a:solidFill>
-                <a:latin typeface="Arial"/>
-              </a:rPr>
-              <a:t>KP1 · Government Enterprise Architecture · Module 2 · Video 2.4</a:t>
-            </a:r>
-          </a:p>
-          <a:p>
-            <a:r>
-              <a:rPr sz="1200" b="0" i="1">
-                <a:solidFill>
-                  <a:srgbClr val="595959"/>
-                </a:solidFill>
-                <a:latin typeface="Arial"/>
-              </a:rPr>
-              <a:t>PAERA publishes a taxonomy of public bodies — policy unit, regulatory agency, service-delivery authority, plus supporting elements like state registries. Classify a body first, and you already know what capabilities, data and governance to expect from it — before you interview anyone.</a:t>
-            </a:r>
-          </a:p>
-        </p:txBody>
-      </p:sp>
-      <p:sp>
-        <p:nvSpPr>
-          <p:cNvPr id="17" name="Title 9">
-            <a:extLst>
-              <a:ext uri="{FF2B5EF4-FFF2-40B4-BE49-F238E27FC236}">
-                <a16:creationId xmlns:a16="http://schemas.microsoft.com/office/drawing/2014/main" id="{5E8796F7-DD26-D250-5E97-B38B22298E72}"/>
-              </a:ext>
-            </a:extLst>
-          </p:cNvPr>
-          <p:cNvSpPr txBox="1">
-            <a:spLocks/>
-          </p:cNvSpPr>
-          <p:nvPr/>
-        </p:nvSpPr>
-        <p:spPr>
-          <a:xfrm>
-            <a:off x="284452" y="4363897"/>
-            <a:ext cx="6382893" cy="953213"/>
-          </a:xfrm>
-          <a:prstGeom prst="rect">
-            <a:avLst/>
-          </a:prstGeom>
-        </p:spPr>
-        <p:txBody>
-          <a:bodyPr anchor="t">
-            <a:noAutofit/>
-          </a:bodyPr>
-          <a:lstStyle>
-            <a:lvl1pPr algn="l" defTabSz="914400" rtl="0" eaLnBrk="1" latinLnBrk="0" hangingPunct="1">
-              <a:lnSpc>
-                <a:spcPct val="90000"/>
-              </a:lnSpc>
-              <a:spcBef>
-                <a:spcPct val="0"/>
-              </a:spcBef>
-              <a:buNone/>
-              <a:defRPr sz="4000" kern="1200">
-                <a:solidFill>
-                  <a:schemeClr val="bg1"/>
-                </a:solidFill>
-                <a:latin typeface="Arial" panose="020B0604020202020204" pitchFamily="34" charset="0"/>
-                <a:ea typeface="+mj-ea"/>
-                <a:cs typeface="Arial" panose="020B0604020202020204" pitchFamily="34" charset="0"/>
-              </a:defRPr>
-            </a:lvl1pPr>
-          </a:lstStyle>
-          <a:p>
-            <a:pPr marL="0" marR="0" lvl="0" indent="0" rtl="0">
-              <a:spcBef>
-                <a:spcPts val="600"/>
-              </a:spcBef>
-              <a:spcAft>
-                <a:spcPts val="1200"/>
-              </a:spcAft>
-              <a:buNone/>
-            </a:pPr>
-            <a:r>
-              <a:rPr sz="1400" b="1" i="0">
-                <a:solidFill>
-                  <a:srgbClr val="1A1A1A"/>
-                </a:solidFill>
-                <a:latin typeface="Arial"/>
-              </a:rPr>
-              <a:t>Target audience: </a:t>
-            </a:r>
-            <a:r>
-              <a:rPr sz="1400" b="0" i="0">
-                <a:solidFill>
-                  <a:srgbClr val="1A1A1A"/>
-                </a:solidFill>
-                <a:latin typeface="Arial"/>
-              </a:rPr>
-              <a:t>Chief architect · senior architect · sector ICT lead</a:t>
-            </a:r>
-          </a:p>
-        </p:txBody>
-      </p:sp>
-      <p:sp>
-        <p:nvSpPr>
-          <p:cNvPr id="18" name="Rectangle 17"/>
-          <p:cNvSpPr/>
-          <p:nvPr/>
-        </p:nvSpPr>
-        <p:spPr>
-          <a:xfrm>
-            <a:off x="7022592" y="0"/>
-            <a:ext cx="5169103" cy="6858000"/>
-          </a:xfrm>
-          <a:prstGeom prst="rect">
-            <a:avLst/>
-          </a:prstGeom>
-          <a:solidFill>
-            <a:srgbClr val="009CD6"/>
-          </a:solidFill>
-          <a:ln>
-            <a:noFill/>
-          </a:ln>
-          <a:effectLst/>
-        </p:spPr>
-        <p:style>
-          <a:lnRef idx="1">
-            <a:schemeClr val="accent1"/>
-          </a:lnRef>
-          <a:fillRef idx="3">
-            <a:schemeClr val="accent1"/>
-          </a:fillRef>
-          <a:effectRef idx="2">
-            <a:schemeClr val="accent1"/>
-          </a:effectRef>
-          <a:fontRef idx="minor">
-            <a:schemeClr val="lt1"/>
-          </a:fontRef>
-        </p:style>
-        <p:txBody>
-          <a:bodyPr rtlCol="0" anchor="ctr"/>
-          <a:lstStyle/>
-          <a:p>
-            <a:pPr algn="ctr"/>
-          </a:p>
-        </p:txBody>
-      </p:sp>
-      <p:sp>
-        <p:nvSpPr>
-          <p:cNvPr id="19" name="TextBox 18"/>
-          <p:cNvSpPr txBox="1"/>
-          <p:nvPr/>
-        </p:nvSpPr>
-        <p:spPr>
-          <a:xfrm>
-            <a:off x="7452360" y="457200"/>
-            <a:ext cx="4297680" cy="457200"/>
-          </a:xfrm>
-          <a:prstGeom prst="rect">
-            <a:avLst/>
-          </a:prstGeom>
-          <a:noFill/>
-        </p:spPr>
-        <p:txBody>
-          <a:bodyPr wrap="square">
-            <a:spAutoFit/>
-          </a:bodyPr>
-          <a:lstStyle/>
-          <a:p>
-            <a:r>
-              <a:rPr sz="1100" b="1" i="0">
-                <a:solidFill>
-                  <a:srgbClr val="E5F5FB"/>
-                </a:solidFill>
-                <a:latin typeface="Arial"/>
-              </a:rPr>
-              <a:t>THE FOUR LAYERS THIS MODULE TEACHES</a:t>
-            </a:r>
-          </a:p>
-        </p:txBody>
-      </p:sp>
-      <p:sp>
-        <p:nvSpPr>
-          <p:cNvPr id="20" name="Rounded Rectangle 19"/>
-          <p:cNvSpPr/>
-          <p:nvPr/>
-        </p:nvSpPr>
-        <p:spPr>
-          <a:xfrm>
-            <a:off x="7452360" y="960120"/>
-            <a:ext cx="3840480" cy="658368"/>
-          </a:xfrm>
-          <a:prstGeom prst="roundRect">
-            <a:avLst>
-              <a:gd name="adj" fmla="val 14000"/>
-            </a:avLst>
-          </a:prstGeom>
-          <a:solidFill>
-            <a:srgbClr val="FFFFFF"/>
-          </a:solidFill>
-          <a:ln>
-            <a:noFill/>
-          </a:ln>
-          <a:effectLst/>
-        </p:spPr>
-        <p:style>
-          <a:lnRef idx="1">
-            <a:schemeClr val="accent1"/>
-          </a:lnRef>
-          <a:fillRef idx="3">
-            <a:schemeClr val="accent1"/>
-          </a:fillRef>
-          <a:effectRef idx="2">
-            <a:schemeClr val="accent1"/>
-          </a:effectRef>
-          <a:fontRef idx="minor">
-            <a:schemeClr val="lt1"/>
-          </a:fontRef>
-        </p:style>
-        <p:txBody>
-          <a:bodyPr rtlCol="0" anchor="ctr" lIns="164592" wrap="square"/>
-          <a:lstStyle/>
-          <a:p>
-            <a:pPr algn="ctr"/>
-            <a:r>
-              <a:rPr sz="1500" b="1" i="0">
-                <a:solidFill>
-                  <a:srgbClr val="1A1A1A"/>
-                </a:solidFill>
-                <a:latin typeface="Arial"/>
-              </a:rPr>
-              <a:t>Business — what the body does</a:t>
-            </a:r>
-          </a:p>
-        </p:txBody>
-      </p:sp>
-      <p:sp>
-        <p:nvSpPr>
-          <p:cNvPr id="21" name="Rounded Rectangle 20"/>
-          <p:cNvSpPr/>
-          <p:nvPr/>
-        </p:nvSpPr>
-        <p:spPr>
-          <a:xfrm>
-            <a:off x="7452360" y="1892808"/>
-            <a:ext cx="3840480" cy="658368"/>
-          </a:xfrm>
-          <a:prstGeom prst="roundRect">
-            <a:avLst>
-              <a:gd name="adj" fmla="val 14000"/>
-            </a:avLst>
-          </a:prstGeom>
-          <a:solidFill>
-            <a:srgbClr val="FFFFFF"/>
-          </a:solidFill>
-          <a:ln>
-            <a:noFill/>
-          </a:ln>
-          <a:effectLst/>
-        </p:spPr>
-        <p:style>
-          <a:lnRef idx="1">
-            <a:schemeClr val="accent1"/>
-          </a:lnRef>
-          <a:fillRef idx="3">
-            <a:schemeClr val="accent1"/>
-          </a:fillRef>
-          <a:effectRef idx="2">
-            <a:schemeClr val="accent1"/>
-          </a:effectRef>
-          <a:fontRef idx="minor">
-            <a:schemeClr val="lt1"/>
-          </a:fontRef>
-        </p:style>
-        <p:txBody>
-          <a:bodyPr rtlCol="0" anchor="ctr" lIns="164592" wrap="square"/>
-          <a:lstStyle/>
-          <a:p>
-            <a:pPr algn="ctr"/>
-            <a:r>
-              <a:rPr sz="1500" b="1" i="0">
-                <a:solidFill>
-                  <a:srgbClr val="1A1A1A"/>
-                </a:solidFill>
-                <a:latin typeface="Arial"/>
-              </a:rPr>
-              <a:t>Data — what it holds, who owns it</a:t>
-            </a:r>
-          </a:p>
-        </p:txBody>
-      </p:sp>
-      <p:sp>
-        <p:nvSpPr>
-          <p:cNvPr id="22" name="Rounded Rectangle 21"/>
-          <p:cNvSpPr/>
-          <p:nvPr/>
-        </p:nvSpPr>
-        <p:spPr>
-          <a:xfrm>
-            <a:off x="7452360" y="2825496"/>
-            <a:ext cx="3840480" cy="658368"/>
-          </a:xfrm>
-          <a:prstGeom prst="roundRect">
-            <a:avLst>
-              <a:gd name="adj" fmla="val 14000"/>
-            </a:avLst>
-          </a:prstGeom>
-          <a:solidFill>
-            <a:srgbClr val="FFFFFF"/>
-          </a:solidFill>
-          <a:ln>
-            <a:noFill/>
-          </a:ln>
-          <a:effectLst/>
-        </p:spPr>
-        <p:style>
-          <a:lnRef idx="1">
-            <a:schemeClr val="accent1"/>
-          </a:lnRef>
-          <a:fillRef idx="3">
-            <a:schemeClr val="accent1"/>
-          </a:fillRef>
-          <a:effectRef idx="2">
-            <a:schemeClr val="accent1"/>
-          </a:effectRef>
-          <a:fontRef idx="minor">
-            <a:schemeClr val="lt1"/>
-          </a:fontRef>
-        </p:style>
-        <p:txBody>
-          <a:bodyPr rtlCol="0" anchor="ctr" lIns="164592" wrap="square"/>
-          <a:lstStyle/>
-          <a:p>
-            <a:pPr algn="ctr"/>
-            <a:r>
-              <a:rPr sz="1500" b="1" i="0">
-                <a:solidFill>
-                  <a:srgbClr val="1A1A1A"/>
-                </a:solidFill>
-                <a:latin typeface="Arial"/>
-              </a:rPr>
-              <a:t>Application — what supports the work</a:t>
-            </a:r>
-          </a:p>
-        </p:txBody>
-      </p:sp>
-      <p:sp>
-        <p:nvSpPr>
-          <p:cNvPr id="23" name="Rounded Rectangle 22"/>
-          <p:cNvSpPr/>
-          <p:nvPr/>
-        </p:nvSpPr>
-        <p:spPr>
-          <a:xfrm>
-            <a:off x="7452360" y="3758184"/>
-            <a:ext cx="3840480" cy="658368"/>
-          </a:xfrm>
-          <a:prstGeom prst="roundRect">
-            <a:avLst>
-              <a:gd name="adj" fmla="val 14000"/>
-            </a:avLst>
-          </a:prstGeom>
-          <a:solidFill>
-            <a:srgbClr val="006E96"/>
-          </a:solidFill>
-          <a:ln>
-            <a:noFill/>
-          </a:ln>
-          <a:effectLst/>
-        </p:spPr>
-        <p:style>
-          <a:lnRef idx="1">
-            <a:schemeClr val="accent1"/>
-          </a:lnRef>
-          <a:fillRef idx="3">
-            <a:schemeClr val="accent1"/>
-          </a:fillRef>
-          <a:effectRef idx="2">
-            <a:schemeClr val="accent1"/>
-          </a:effectRef>
-          <a:fontRef idx="minor">
-            <a:schemeClr val="lt1"/>
-          </a:fontRef>
-        </p:style>
-        <p:txBody>
-          <a:bodyPr rtlCol="0" anchor="ctr" lIns="164592" wrap="square"/>
-          <a:lstStyle/>
-          <a:p>
-            <a:pPr algn="ctr"/>
-            <a:r>
-              <a:rPr sz="1500" b="1" i="0">
-                <a:solidFill>
-                  <a:srgbClr val="FFFFFF"/>
-                </a:solidFill>
-                <a:latin typeface="Arial"/>
-              </a:rPr>
-              <a:t>Technology — what it all runs on</a:t>
-            </a:r>
-          </a:p>
-        </p:txBody>
-      </p:sp>
-      <p:sp>
-        <p:nvSpPr>
-          <p:cNvPr id="24" name="TextBox 23"/>
-          <p:cNvSpPr txBox="1"/>
-          <p:nvPr/>
-        </p:nvSpPr>
-        <p:spPr>
-          <a:xfrm>
-            <a:off x="7452360" y="5806440"/>
-            <a:ext cx="4297680" cy="731520"/>
-          </a:xfrm>
-          <a:prstGeom prst="rect">
-            <a:avLst/>
-          </a:prstGeom>
-          <a:noFill/>
-        </p:spPr>
-        <p:txBody>
-          <a:bodyPr wrap="square">
-            <a:spAutoFit/>
-          </a:bodyPr>
-          <a:lstStyle/>
-          <a:p>
-            <a:r>
-              <a:rPr sz="1200" b="0" i="0">
-                <a:solidFill>
-                  <a:srgbClr val="FFFFFF"/>
-                </a:solidFill>
-                <a:latin typeface="Arial"/>
-              </a:rPr>
-              <a:t>6 shared entities · 10 principles to adopt · 2 traps to catch at Assess</a:t>
-            </a:r>
-          </a:p>
-        </p:txBody>
-      </p:sp>
-    </p:spTree>
-    <p:extLst>
-      <p:ext uri="{BB962C8B-B14F-4D97-AF65-F5344CB8AC3E}">
-        <p14:creationId xmlns:p14="http://schemas.microsoft.com/office/powerpoint/2010/main" val="1196800265"/>
-      </p:ext>
-    </p:extLst>
-  </p:cSld>
-  <p:clrMapOvr>
-    <a:masterClrMapping/>
-  </p:clrMapOvr>
-</p:sld>
-</file>
-
-<file path=ppt/slides/slide25.xml><?xml version="1.0" encoding="utf-8"?>
-<p:sld xmlns:a="http://schemas.openxmlformats.org/drawingml/2006/main" xmlns:p="http://schemas.openxmlformats.org/presentationml/2006/main" xmlns:r="http://schemas.openxmlformats.org/officeDocument/2006/relationships">
-  <p:cSld>
-    <p:spTree>
-      <p:nvGrpSpPr>
-        <p:cNvPr id="1" name=""/>
-        <p:cNvGrpSpPr/>
-        <p:nvPr/>
-      </p:nvGrpSpPr>
-      <p:grpSpPr/>
-      <p:sp>
-        <p:nvSpPr>
-          <p:cNvPr id="2" name="TextBox 1"/>
-          <p:cNvSpPr txBox="1"/>
-          <p:nvPr/>
-        </p:nvSpPr>
-        <p:spPr>
-          <a:xfrm>
-            <a:off x="822960" y="822960"/>
-            <a:ext cx="7315200" cy="457200"/>
-          </a:xfrm>
-          <a:prstGeom prst="rect">
-            <a:avLst/>
-          </a:prstGeom>
-          <a:noFill/>
-        </p:spPr>
-        <p:txBody>
-          <a:bodyPr wrap="square">
-            <a:spAutoFit/>
-          </a:bodyPr>
-          <a:lstStyle/>
-          <a:p>
-            <a:r>
-              <a:rPr sz="1200" b="1" i="0">
-                <a:solidFill>
-                  <a:srgbClr val="595959"/>
-                </a:solidFill>
-                <a:latin typeface="Arial"/>
-              </a:rPr>
-              <a:t>KP1 · MODULE 2 · VIDEO 2.4</a:t>
-            </a:r>
-          </a:p>
-        </p:txBody>
-      </p:sp>
-      <p:sp>
-        <p:nvSpPr>
-          <p:cNvPr id="3" name="TextBox 2"/>
-          <p:cNvSpPr txBox="1"/>
-          <p:nvPr/>
-        </p:nvSpPr>
-        <p:spPr>
-          <a:xfrm>
-            <a:off x="822960" y="1828800"/>
-            <a:ext cx="2011680" cy="1097280"/>
-          </a:xfrm>
-          <a:prstGeom prst="rect">
-            <a:avLst/>
-          </a:prstGeom>
-          <a:noFill/>
-        </p:spPr>
-        <p:txBody>
-          <a:bodyPr wrap="square">
-            <a:spAutoFit/>
-          </a:bodyPr>
-          <a:lstStyle/>
-          <a:p>
-            <a:r>
-              <a:rPr sz="6000" b="1" i="0">
-                <a:solidFill>
-                  <a:srgbClr val="009CD6"/>
-                </a:solidFill>
-                <a:latin typeface="Arial"/>
-              </a:rPr>
-              <a:t>2.4</a:t>
-            </a:r>
-          </a:p>
-        </p:txBody>
-      </p:sp>
-      <p:sp>
-        <p:nvSpPr>
-          <p:cNvPr id="4" name="TextBox 3"/>
-          <p:cNvSpPr txBox="1"/>
-          <p:nvPr/>
-        </p:nvSpPr>
-        <p:spPr>
-          <a:xfrm>
-            <a:off x="822960" y="2880360"/>
-            <a:ext cx="9601200" cy="1371600"/>
-          </a:xfrm>
-          <a:prstGeom prst="rect">
-            <a:avLst/>
-          </a:prstGeom>
-          <a:noFill/>
-        </p:spPr>
-        <p:txBody>
-          <a:bodyPr wrap="square">
-            <a:spAutoFit/>
-          </a:bodyPr>
-          <a:lstStyle/>
-          <a:p>
-            <a:r>
-              <a:rPr sz="3400" b="1" i="0">
-                <a:solidFill>
-                  <a:srgbClr val="1A1A1A"/>
-                </a:solidFill>
-                <a:latin typeface="Arial"/>
-              </a:rPr>
-              <a:t>Classify any public body before you model it</a:t>
-            </a:r>
-          </a:p>
-        </p:txBody>
-      </p:sp>
-      <p:sp>
-        <p:nvSpPr>
-          <p:cNvPr id="5" name="TextBox 4"/>
-          <p:cNvSpPr txBox="1"/>
-          <p:nvPr/>
-        </p:nvSpPr>
-        <p:spPr>
-          <a:xfrm>
-            <a:off x="822960" y="4343400"/>
-            <a:ext cx="9875520" cy="1554480"/>
-          </a:xfrm>
-          <a:prstGeom prst="rect">
-            <a:avLst/>
-          </a:prstGeom>
-          <a:noFill/>
-        </p:spPr>
-        <p:txBody>
-          <a:bodyPr wrap="square">
-            <a:spAutoFit/>
-          </a:bodyPr>
-          <a:lstStyle/>
-          <a:p>
-            <a:r>
-              <a:rPr sz="1700" b="0" i="1">
-                <a:solidFill>
-                  <a:srgbClr val="595959"/>
-                </a:solidFill>
-                <a:latin typeface="Arial"/>
-              </a:rPr>
-              <a:t>PAERA publishes a taxonomy of public bodies — policy unit, regulatory agency, service-delivery authority, plus supporting elements like state registries. Classify a body first, and you already know what capabilities, data and governance to expect from it — before you interview anyone.</a:t>
-            </a:r>
-          </a:p>
-        </p:txBody>
-      </p:sp>
-      <p:sp>
-        <p:nvSpPr>
-          <p:cNvPr id="6" name="TextBox 5"/>
-          <p:cNvSpPr txBox="1"/>
-          <p:nvPr/>
-        </p:nvSpPr>
-        <p:spPr>
-          <a:xfrm>
-            <a:off x="822960" y="5989320"/>
-            <a:ext cx="7315200" cy="365760"/>
-          </a:xfrm>
-          <a:prstGeom prst="rect">
-            <a:avLst/>
-          </a:prstGeom>
-          <a:noFill/>
-        </p:spPr>
-        <p:txBody>
-          <a:bodyPr wrap="square">
-            <a:spAutoFit/>
-          </a:bodyPr>
-          <a:lstStyle/>
-          <a:p>
-            <a:r>
-              <a:rPr sz="1200" b="0" i="0">
-                <a:solidFill>
-                  <a:srgbClr val="595959"/>
-                </a:solidFill>
-                <a:latin typeface="Arial"/>
-              </a:rPr>
-              <a:t>~4 minutes · standalone video · voice-over on text slides</a:t>
-            </a:r>
-          </a:p>
-        </p:txBody>
-      </p:sp>
-    </p:spTree>
-  </p:cSld>
-  <p:clrMapOvr>
-    <a:masterClrMapping/>
-  </p:clrMapOvr>
-</p:sld>
-</file>
-
-<file path=ppt/slides/slide26.xml><?xml version="1.0" encoding="utf-8"?>
-<p:sld xmlns:a="http://schemas.openxmlformats.org/drawingml/2006/main" xmlns:p="http://schemas.openxmlformats.org/presentationml/2006/main" xmlns:r="http://schemas.openxmlformats.org/officeDocument/2006/relationships">
-  <p:cSld>
-    <p:spTree>
-      <p:nvGrpSpPr>
-        <p:cNvPr id="1" name=""/>
-        <p:cNvGrpSpPr/>
-        <p:nvPr/>
-      </p:nvGrpSpPr>
-      <p:grpSpPr/>
-      <p:sp>
-        <p:nvSpPr>
-          <p:cNvPr id="2" name="Rectangle 1"/>
-          <p:cNvSpPr/>
-          <p:nvPr/>
-        </p:nvSpPr>
-        <p:spPr>
-          <a:xfrm>
-            <a:off x="457200" y="384048"/>
-            <a:ext cx="45720" cy="256032"/>
-          </a:xfrm>
-          <a:prstGeom prst="rect">
-            <a:avLst/>
-          </a:prstGeom>
-          <a:solidFill>
-            <a:srgbClr val="009CD6"/>
-          </a:solidFill>
-          <a:ln>
-            <a:noFill/>
-          </a:ln>
-          <a:effectLst/>
-        </p:spPr>
-        <p:style>
-          <a:lnRef idx="1">
-            <a:schemeClr val="accent1"/>
-          </a:lnRef>
-          <a:fillRef idx="3">
-            <a:schemeClr val="accent1"/>
-          </a:fillRef>
-          <a:effectRef idx="2">
-            <a:schemeClr val="accent1"/>
-          </a:effectRef>
-          <a:fontRef idx="minor">
-            <a:schemeClr val="lt1"/>
-          </a:fontRef>
-        </p:style>
-        <p:txBody>
-          <a:bodyPr rtlCol="0" anchor="ctr"/>
-          <a:lstStyle/>
-          <a:p>
-            <a:pPr algn="ctr"/>
-          </a:p>
-        </p:txBody>
-      </p:sp>
-      <p:sp>
-        <p:nvSpPr>
-          <p:cNvPr id="3" name="TextBox 2"/>
-          <p:cNvSpPr txBox="1"/>
-          <p:nvPr/>
-        </p:nvSpPr>
-        <p:spPr>
-          <a:xfrm>
-            <a:off x="621792" y="274320"/>
-            <a:ext cx="11247120" cy="914400"/>
-          </a:xfrm>
-          <a:prstGeom prst="rect">
-            <a:avLst/>
-          </a:prstGeom>
-          <a:noFill/>
-        </p:spPr>
-        <p:txBody>
-          <a:bodyPr wrap="square">
-            <a:spAutoFit/>
-          </a:bodyPr>
-          <a:lstStyle/>
-          <a:p>
-            <a:r>
-              <a:rPr sz="2800" b="1" i="0">
-                <a:solidFill>
-                  <a:srgbClr val="1A1A1A"/>
-                </a:solidFill>
-                <a:latin typeface="Arial"/>
-              </a:rPr>
-              <a:t>Three types cover most of government</a:t>
-            </a:r>
-          </a:p>
-        </p:txBody>
-      </p:sp>
-      <p:sp>
-        <p:nvSpPr>
-          <p:cNvPr id="4" name="Rounded Rectangle 3"/>
-          <p:cNvSpPr/>
-          <p:nvPr/>
-        </p:nvSpPr>
-        <p:spPr>
-          <a:xfrm>
-            <a:off x="658368" y="1554480"/>
-            <a:ext cx="3566160" cy="3886200"/>
-          </a:xfrm>
-          <a:prstGeom prst="roundRect">
-            <a:avLst>
-              <a:gd name="adj" fmla="val 4500"/>
-            </a:avLst>
-          </a:prstGeom>
-          <a:solidFill>
-            <a:srgbClr val="E5F5FB"/>
-          </a:solidFill>
-          <a:ln>
-            <a:noFill/>
-          </a:ln>
-          <a:effectLst/>
-        </p:spPr>
-        <p:style>
-          <a:lnRef idx="1">
-            <a:schemeClr val="accent1"/>
-          </a:lnRef>
-          <a:fillRef idx="3">
-            <a:schemeClr val="accent1"/>
-          </a:fillRef>
-          <a:effectRef idx="2">
-            <a:schemeClr val="accent1"/>
-          </a:effectRef>
-          <a:fontRef idx="minor">
-            <a:schemeClr val="lt1"/>
-          </a:fontRef>
-        </p:style>
-        <p:txBody>
-          <a:bodyPr rtlCol="0" anchor="ctr"/>
-          <a:lstStyle/>
-          <a:p>
-            <a:pPr algn="ctr"/>
-          </a:p>
-        </p:txBody>
-      </p:sp>
-      <p:sp>
-        <p:nvSpPr>
-          <p:cNvPr id="5" name="TextBox 4"/>
-          <p:cNvSpPr txBox="1"/>
-          <p:nvPr/>
-        </p:nvSpPr>
-        <p:spPr>
-          <a:xfrm>
-            <a:off x="859536" y="1700784"/>
-            <a:ext cx="3163824" cy="3611880"/>
-          </a:xfrm>
-          <a:prstGeom prst="rect">
-            <a:avLst/>
-          </a:prstGeom>
-          <a:noFill/>
-        </p:spPr>
-        <p:txBody>
-          <a:bodyPr wrap="square">
-            <a:spAutoFit/>
-          </a:bodyPr>
-          <a:lstStyle/>
-          <a:p>
-            <a:pPr>
-              <a:spcAft>
-                <a:spcPts val="700"/>
-              </a:spcAft>
-            </a:pPr>
-            <a:r>
-              <a:rPr sz="1900" b="1" i="0">
-                <a:solidFill>
-                  <a:srgbClr val="006E96"/>
-                </a:solidFill>
-                <a:latin typeface="Arial"/>
-              </a:rPr>
-              <a:t>Policy unit</a:t>
-            </a:r>
-          </a:p>
-          <a:p>
-            <a:pPr>
-              <a:spcAft>
-                <a:spcPts val="700"/>
-              </a:spcAft>
-            </a:pPr>
-            <a:r>
-              <a:rPr sz="1500" b="0" i="0">
-                <a:solidFill>
-                  <a:srgbClr val="1A1A1A"/>
-                </a:solidFill>
-                <a:latin typeface="Arial"/>
-              </a:rPr>
-              <a:t>Sets policy, owns the rules.</a:t>
-            </a:r>
-          </a:p>
-          <a:p>
-            <a:pPr>
-              <a:spcAft>
-                <a:spcPts val="700"/>
-              </a:spcAft>
-            </a:pPr>
-            <a:r>
-              <a:rPr sz="1500" b="0" i="0">
-                <a:solidFill>
-                  <a:srgbClr val="1A1A1A"/>
-                </a:solidFill>
-                <a:latin typeface="Arial"/>
-              </a:rPr>
-              <a:t>Does not run services at scale — it decides what the services should be.</a:t>
-            </a:r>
-          </a:p>
-          <a:p>
-            <a:pPr>
-              <a:spcAft>
-                <a:spcPts val="700"/>
-              </a:spcAft>
-            </a:pPr>
-            <a:r>
-              <a:rPr sz="1500" b="0" i="0">
-                <a:solidFill>
-                  <a:srgbClr val="1A1A1A"/>
-                </a:solidFill>
-                <a:latin typeface="Arial"/>
-              </a:rPr>
-              <a:t>Usually a ministry’s core.</a:t>
-            </a:r>
-          </a:p>
-        </p:txBody>
-      </p:sp>
-      <p:sp>
-        <p:nvSpPr>
-          <p:cNvPr id="6" name="Rounded Rectangle 5"/>
-          <p:cNvSpPr/>
-          <p:nvPr/>
-        </p:nvSpPr>
-        <p:spPr>
-          <a:xfrm>
-            <a:off x="4407407" y="1554480"/>
-            <a:ext cx="3566160" cy="3886200"/>
-          </a:xfrm>
-          <a:prstGeom prst="roundRect">
-            <a:avLst>
-              <a:gd name="adj" fmla="val 4500"/>
-            </a:avLst>
-          </a:prstGeom>
-          <a:solidFill>
-            <a:srgbClr val="E5F5FB"/>
-          </a:solidFill>
-          <a:ln>
-            <a:noFill/>
-          </a:ln>
-          <a:effectLst/>
-        </p:spPr>
-        <p:style>
-          <a:lnRef idx="1">
-            <a:schemeClr val="accent1"/>
-          </a:lnRef>
-          <a:fillRef idx="3">
-            <a:schemeClr val="accent1"/>
-          </a:fillRef>
-          <a:effectRef idx="2">
-            <a:schemeClr val="accent1"/>
-          </a:effectRef>
-          <a:fontRef idx="minor">
-            <a:schemeClr val="lt1"/>
-          </a:fontRef>
-        </p:style>
-        <p:txBody>
-          <a:bodyPr rtlCol="0" anchor="ctr"/>
-          <a:lstStyle/>
-          <a:p>
-            <a:pPr algn="ctr"/>
-          </a:p>
-        </p:txBody>
-      </p:sp>
-      <p:sp>
-        <p:nvSpPr>
-          <p:cNvPr id="7" name="TextBox 6"/>
-          <p:cNvSpPr txBox="1"/>
-          <p:nvPr/>
-        </p:nvSpPr>
-        <p:spPr>
-          <a:xfrm>
-            <a:off x="4608575" y="1700784"/>
-            <a:ext cx="3163824" cy="3611880"/>
-          </a:xfrm>
-          <a:prstGeom prst="rect">
-            <a:avLst/>
-          </a:prstGeom>
-          <a:noFill/>
-        </p:spPr>
-        <p:txBody>
-          <a:bodyPr wrap="square">
-            <a:spAutoFit/>
-          </a:bodyPr>
-          <a:lstStyle/>
-          <a:p>
-            <a:pPr>
-              <a:spcAft>
-                <a:spcPts val="700"/>
-              </a:spcAft>
-            </a:pPr>
-            <a:r>
-              <a:rPr sz="1900" b="1" i="0">
-                <a:solidFill>
-                  <a:srgbClr val="006E96"/>
-                </a:solidFill>
-                <a:latin typeface="Arial"/>
-              </a:rPr>
-              <a:t>Regulatory agency</a:t>
-            </a:r>
-          </a:p>
-          <a:p>
-            <a:pPr>
-              <a:spcAft>
-                <a:spcPts val="700"/>
-              </a:spcAft>
-            </a:pPr>
-            <a:r>
-              <a:rPr sz="1500" b="0" i="0">
-                <a:solidFill>
-                  <a:srgbClr val="1A1A1A"/>
-                </a:solidFill>
-                <a:latin typeface="Arial"/>
-              </a:rPr>
-              <a:t>Licenses, supervises, enforces.</a:t>
-            </a:r>
-          </a:p>
-          <a:p>
-            <a:pPr>
-              <a:spcAft>
-                <a:spcPts val="700"/>
-              </a:spcAft>
-            </a:pPr>
-            <a:r>
-              <a:rPr sz="1500" b="0" i="0">
-                <a:solidFill>
-                  <a:srgbClr val="1A1A1A"/>
-                </a:solidFill>
-                <a:latin typeface="Arial"/>
-              </a:rPr>
-              <a:t>Holds registers of the things it regulates and records of its decisions.</a:t>
-            </a:r>
-          </a:p>
-          <a:p>
-            <a:pPr>
-              <a:spcAft>
-                <a:spcPts val="700"/>
-              </a:spcAft>
-            </a:pPr>
-            <a:r>
-              <a:rPr sz="1500" b="0" i="0">
-                <a:solidFill>
-                  <a:srgbClr val="1A1A1A"/>
-                </a:solidFill>
-                <a:latin typeface="Arial"/>
-              </a:rPr>
-              <a:t>Expect an appeals process.</a:t>
-            </a:r>
-          </a:p>
-        </p:txBody>
-      </p:sp>
-      <p:sp>
-        <p:nvSpPr>
-          <p:cNvPr id="8" name="Rounded Rectangle 7"/>
-          <p:cNvSpPr/>
-          <p:nvPr/>
-        </p:nvSpPr>
-        <p:spPr>
-          <a:xfrm>
-            <a:off x="8156448" y="1554480"/>
-            <a:ext cx="3566160" cy="3886200"/>
-          </a:xfrm>
-          <a:prstGeom prst="roundRect">
-            <a:avLst>
-              <a:gd name="adj" fmla="val 4500"/>
-            </a:avLst>
-          </a:prstGeom>
-          <a:solidFill>
-            <a:srgbClr val="E5F5FB"/>
-          </a:solidFill>
-          <a:ln>
-            <a:noFill/>
-          </a:ln>
-          <a:effectLst/>
-        </p:spPr>
-        <p:style>
-          <a:lnRef idx="1">
-            <a:schemeClr val="accent1"/>
-          </a:lnRef>
-          <a:fillRef idx="3">
-            <a:schemeClr val="accent1"/>
-          </a:fillRef>
-          <a:effectRef idx="2">
-            <a:schemeClr val="accent1"/>
-          </a:effectRef>
-          <a:fontRef idx="minor">
-            <a:schemeClr val="lt1"/>
-          </a:fontRef>
-        </p:style>
-        <p:txBody>
-          <a:bodyPr rtlCol="0" anchor="ctr"/>
-          <a:lstStyle/>
-          <a:p>
-            <a:pPr algn="ctr"/>
-          </a:p>
-        </p:txBody>
-      </p:sp>
-      <p:sp>
-        <p:nvSpPr>
-          <p:cNvPr id="9" name="TextBox 8"/>
-          <p:cNvSpPr txBox="1"/>
-          <p:nvPr/>
-        </p:nvSpPr>
-        <p:spPr>
-          <a:xfrm>
-            <a:off x="8357616" y="1700784"/>
-            <a:ext cx="3163824" cy="3611880"/>
-          </a:xfrm>
-          <a:prstGeom prst="rect">
-            <a:avLst/>
-          </a:prstGeom>
-          <a:noFill/>
-        </p:spPr>
-        <p:txBody>
-          <a:bodyPr wrap="square">
-            <a:spAutoFit/>
-          </a:bodyPr>
-          <a:lstStyle/>
-          <a:p>
-            <a:pPr>
-              <a:spcAft>
-                <a:spcPts val="700"/>
-              </a:spcAft>
-            </a:pPr>
-            <a:r>
-              <a:rPr sz="1900" b="1" i="0">
-                <a:solidFill>
-                  <a:srgbClr val="006E96"/>
-                </a:solidFill>
-                <a:latin typeface="Arial"/>
-              </a:rPr>
-              <a:t>Service-delivery authority</a:t>
-            </a:r>
-          </a:p>
-          <a:p>
-            <a:pPr>
-              <a:spcAft>
-                <a:spcPts val="700"/>
-              </a:spcAft>
-            </a:pPr>
-            <a:r>
-              <a:rPr sz="1500" b="0" i="0">
-                <a:solidFill>
-                  <a:srgbClr val="1A1A1A"/>
-                </a:solidFill>
-                <a:latin typeface="Arial"/>
-              </a:rPr>
-              <a:t>Runs services to citizens at scale.</a:t>
-            </a:r>
-          </a:p>
-          <a:p>
-            <a:pPr>
-              <a:spcAft>
-                <a:spcPts val="700"/>
-              </a:spcAft>
-            </a:pPr>
-            <a:r>
-              <a:rPr sz="1500" b="0" i="0">
-                <a:solidFill>
-                  <a:srgbClr val="1A1A1A"/>
-                </a:solidFill>
-                <a:latin typeface="Arial"/>
-              </a:rPr>
-              <a:t>Has the queues, the case files, the front-line systems.</a:t>
-            </a:r>
-          </a:p>
-          <a:p>
-            <a:pPr>
-              <a:spcAft>
-                <a:spcPts val="700"/>
-              </a:spcAft>
-            </a:pPr>
-            <a:r>
-              <a:rPr sz="1500" b="0" i="0">
-                <a:solidFill>
-                  <a:srgbClr val="1A1A1A"/>
-                </a:solidFill>
-                <a:latin typeface="Arial"/>
-              </a:rPr>
-              <a:t>Expect high transaction volumes.</a:t>
-            </a:r>
-          </a:p>
-        </p:txBody>
-      </p:sp>
-      <p:sp>
-        <p:nvSpPr>
-          <p:cNvPr id="10" name="TextBox 9"/>
-          <p:cNvSpPr txBox="1"/>
-          <p:nvPr/>
-        </p:nvSpPr>
-        <p:spPr>
-          <a:xfrm>
-            <a:off x="658368" y="5577840"/>
-            <a:ext cx="10881360" cy="640080"/>
-          </a:xfrm>
-          <a:prstGeom prst="rect">
-            <a:avLst/>
-          </a:prstGeom>
-          <a:noFill/>
-        </p:spPr>
-        <p:txBody>
-          <a:bodyPr wrap="square">
-            <a:spAutoFit/>
-          </a:bodyPr>
-          <a:lstStyle/>
-          <a:p>
-            <a:r>
-              <a:rPr sz="1500" b="1" i="0">
-                <a:solidFill>
-                  <a:srgbClr val="006E96"/>
-                </a:solidFill>
-                <a:latin typeface="Arial"/>
-              </a:rPr>
-              <a:t>Tell me which of the three a body is, and I can already guess its main capabilities and data domains before I meet anyone.</a:t>
-            </a:r>
-          </a:p>
-        </p:txBody>
-      </p:sp>
-      <p:sp>
-        <p:nvSpPr>
-          <p:cNvPr id="11" name="TextBox 10"/>
-          <p:cNvSpPr txBox="1"/>
-          <p:nvPr/>
-        </p:nvSpPr>
-        <p:spPr>
-          <a:xfrm>
-            <a:off x="457200" y="6473952"/>
-            <a:ext cx="7772400" cy="292608"/>
-          </a:xfrm>
-          <a:prstGeom prst="rect">
-            <a:avLst/>
-          </a:prstGeom>
-          <a:noFill/>
-        </p:spPr>
-        <p:txBody>
-          <a:bodyPr wrap="square">
-            <a:spAutoFit/>
-          </a:bodyPr>
-          <a:lstStyle/>
-          <a:p>
-            <a:r>
-              <a:rPr sz="900" b="0" i="0">
-                <a:solidFill>
-                  <a:srgbClr val="595959"/>
-                </a:solidFill>
-                <a:latin typeface="Arial"/>
-              </a:rPr>
-              <a:t>2.4 · Classify any public body before you model it</a:t>
-            </a:r>
-          </a:p>
-        </p:txBody>
-      </p:sp>
-    </p:spTree>
-  </p:cSld>
-  <p:clrMapOvr>
-    <a:masterClrMapping/>
-  </p:clrMapOvr>
-</p:sld>
-</file>
-
-<file path=ppt/slides/slide27.xml><?xml version="1.0" encoding="utf-8"?>
-<p:sld xmlns:a="http://schemas.openxmlformats.org/drawingml/2006/main" xmlns:p="http://schemas.openxmlformats.org/presentationml/2006/main" xmlns:r="http://schemas.openxmlformats.org/officeDocument/2006/relationships">
-  <p:cSld>
-    <p:spTree>
-      <p:nvGrpSpPr>
-        <p:cNvPr id="1" name=""/>
-        <p:cNvGrpSpPr/>
-        <p:nvPr/>
-      </p:nvGrpSpPr>
-      <p:grpSpPr/>
-      <p:sp>
-        <p:nvSpPr>
-          <p:cNvPr id="2" name="Rectangle 1"/>
-          <p:cNvSpPr/>
-          <p:nvPr/>
-        </p:nvSpPr>
-        <p:spPr>
-          <a:xfrm>
-            <a:off x="457200" y="384048"/>
-            <a:ext cx="45720" cy="256032"/>
-          </a:xfrm>
-          <a:prstGeom prst="rect">
-            <a:avLst/>
-          </a:prstGeom>
-          <a:solidFill>
-            <a:srgbClr val="009CD6"/>
-          </a:solidFill>
-          <a:ln>
-            <a:noFill/>
-          </a:ln>
-          <a:effectLst/>
-        </p:spPr>
-        <p:style>
-          <a:lnRef idx="1">
-            <a:schemeClr val="accent1"/>
-          </a:lnRef>
-          <a:fillRef idx="3">
-            <a:schemeClr val="accent1"/>
-          </a:fillRef>
-          <a:effectRef idx="2">
-            <a:schemeClr val="accent1"/>
-          </a:effectRef>
-          <a:fontRef idx="minor">
-            <a:schemeClr val="lt1"/>
-          </a:fontRef>
-        </p:style>
-        <p:txBody>
-          <a:bodyPr rtlCol="0" anchor="ctr"/>
-          <a:lstStyle/>
-          <a:p>
-            <a:pPr algn="ctr"/>
-          </a:p>
-        </p:txBody>
-      </p:sp>
-      <p:sp>
-        <p:nvSpPr>
-          <p:cNvPr id="3" name="TextBox 2"/>
-          <p:cNvSpPr txBox="1"/>
-          <p:nvPr/>
-        </p:nvSpPr>
-        <p:spPr>
-          <a:xfrm>
-            <a:off x="621792" y="274320"/>
-            <a:ext cx="11247120" cy="914400"/>
-          </a:xfrm>
-          <a:prstGeom prst="rect">
-            <a:avLst/>
-          </a:prstGeom>
-          <a:noFill/>
-        </p:spPr>
-        <p:txBody>
-          <a:bodyPr wrap="square">
-            <a:spAutoFit/>
-          </a:bodyPr>
-          <a:lstStyle/>
-          <a:p>
-            <a:r>
-              <a:rPr sz="2800" b="1" i="0">
-                <a:solidFill>
-                  <a:srgbClr val="1A1A1A"/>
-                </a:solidFill>
-                <a:latin typeface="Arial"/>
-              </a:rPr>
-              <a:t>Around those three sit the foundations everyone else stands on</a:t>
-            </a:r>
-          </a:p>
-        </p:txBody>
-      </p:sp>
-      <p:sp>
-        <p:nvSpPr>
-          <p:cNvPr id="4" name="Rounded Rectangle 3"/>
-          <p:cNvSpPr/>
-          <p:nvPr/>
-        </p:nvSpPr>
-        <p:spPr>
-          <a:xfrm>
-            <a:off x="658368" y="1554480"/>
-            <a:ext cx="5394960" cy="3977639"/>
-          </a:xfrm>
-          <a:prstGeom prst="roundRect">
-            <a:avLst>
-              <a:gd name="adj" fmla="val 4500"/>
-            </a:avLst>
-          </a:prstGeom>
-          <a:solidFill>
-            <a:srgbClr val="E5F5FB"/>
-          </a:solidFill>
-          <a:ln>
-            <a:noFill/>
-          </a:ln>
-          <a:effectLst/>
-        </p:spPr>
-        <p:style>
-          <a:lnRef idx="1">
-            <a:schemeClr val="accent1"/>
-          </a:lnRef>
-          <a:fillRef idx="3">
-            <a:schemeClr val="accent1"/>
-          </a:fillRef>
-          <a:effectRef idx="2">
-            <a:schemeClr val="accent1"/>
-          </a:effectRef>
-          <a:fontRef idx="minor">
-            <a:schemeClr val="lt1"/>
-          </a:fontRef>
-        </p:style>
-        <p:txBody>
-          <a:bodyPr rtlCol="0" anchor="ctr"/>
-          <a:lstStyle/>
-          <a:p>
-            <a:pPr algn="ctr"/>
-          </a:p>
-        </p:txBody>
-      </p:sp>
-      <p:sp>
-        <p:nvSpPr>
-          <p:cNvPr id="5" name="TextBox 4"/>
-          <p:cNvSpPr txBox="1"/>
-          <p:nvPr/>
-        </p:nvSpPr>
-        <p:spPr>
-          <a:xfrm>
-            <a:off x="859536" y="1700784"/>
-            <a:ext cx="4992624" cy="3703320"/>
-          </a:xfrm>
-          <a:prstGeom prst="rect">
-            <a:avLst/>
-          </a:prstGeom>
-          <a:noFill/>
-        </p:spPr>
-        <p:txBody>
-          <a:bodyPr wrap="square">
-            <a:spAutoFit/>
-          </a:bodyPr>
-          <a:lstStyle/>
-          <a:p>
-            <a:pPr>
-              <a:spcAft>
-                <a:spcPts val="700"/>
-              </a:spcAft>
-            </a:pPr>
-            <a:r>
-              <a:rPr sz="1900" b="1" i="0">
-                <a:solidFill>
-                  <a:srgbClr val="006E96"/>
-                </a:solidFill>
-                <a:latin typeface="Arial"/>
-              </a:rPr>
-              <a:t>State registries</a:t>
-            </a:r>
-          </a:p>
-          <a:p>
-            <a:pPr>
-              <a:spcAft>
-                <a:spcPts val="700"/>
-              </a:spcAft>
-            </a:pPr>
-            <a:r>
-              <a:rPr sz="1600" b="0" i="0">
-                <a:solidFill>
-                  <a:srgbClr val="1A1A1A"/>
-                </a:solidFill>
-                <a:latin typeface="Arial"/>
-              </a:rPr>
-              <a:t>The authoritative single source for a kind of thing:</a:t>
-            </a:r>
-          </a:p>
-          <a:p>
-            <a:pPr>
-              <a:spcAft>
-                <a:spcPts val="700"/>
-              </a:spcAft>
-            </a:pPr>
-            <a:r>
-              <a:rPr sz="1600" b="0" i="0">
-                <a:solidFill>
-                  <a:srgbClr val="1A1A1A"/>
-                </a:solidFill>
-                <a:latin typeface="Arial"/>
-              </a:rPr>
-              <a:t>person · business · land · learner.</a:t>
-            </a:r>
-          </a:p>
-          <a:p>
-            <a:pPr>
-              <a:spcAft>
-                <a:spcPts val="700"/>
-              </a:spcAft>
-            </a:pPr>
-            <a:r>
-              <a:rPr sz="1600" b="0" i="0">
-                <a:solidFill>
-                  <a:srgbClr val="1A1A1A"/>
-                </a:solidFill>
-                <a:latin typeface="Arial"/>
-              </a:rPr>
-              <a:t>A registry’s whole job is to be the one place the truth lives.</a:t>
-            </a:r>
-          </a:p>
-        </p:txBody>
-      </p:sp>
-      <p:sp>
-        <p:nvSpPr>
-          <p:cNvPr id="6" name="Rounded Rectangle 5"/>
-          <p:cNvSpPr/>
-          <p:nvPr/>
-        </p:nvSpPr>
-        <p:spPr>
-          <a:xfrm>
-            <a:off x="6263640" y="1554480"/>
-            <a:ext cx="5394960" cy="3977639"/>
-          </a:xfrm>
-          <a:prstGeom prst="roundRect">
-            <a:avLst>
-              <a:gd name="adj" fmla="val 4500"/>
-            </a:avLst>
-          </a:prstGeom>
-          <a:solidFill>
-            <a:srgbClr val="E5F5FB"/>
-          </a:solidFill>
-          <a:ln>
-            <a:noFill/>
-          </a:ln>
-          <a:effectLst/>
-        </p:spPr>
-        <p:style>
-          <a:lnRef idx="1">
-            <a:schemeClr val="accent1"/>
-          </a:lnRef>
-          <a:fillRef idx="3">
-            <a:schemeClr val="accent1"/>
-          </a:fillRef>
-          <a:effectRef idx="2">
-            <a:schemeClr val="accent1"/>
-          </a:effectRef>
-          <a:fontRef idx="minor">
-            <a:schemeClr val="lt1"/>
-          </a:fontRef>
-        </p:style>
-        <p:txBody>
-          <a:bodyPr rtlCol="0" anchor="ctr"/>
-          <a:lstStyle/>
-          <a:p>
-            <a:pPr algn="ctr"/>
-          </a:p>
-        </p:txBody>
-      </p:sp>
-      <p:sp>
-        <p:nvSpPr>
-          <p:cNvPr id="7" name="TextBox 6"/>
-          <p:cNvSpPr txBox="1"/>
-          <p:nvPr/>
-        </p:nvSpPr>
-        <p:spPr>
-          <a:xfrm>
-            <a:off x="6464808" y="1700784"/>
-            <a:ext cx="4992624" cy="3703320"/>
-          </a:xfrm>
-          <a:prstGeom prst="rect">
-            <a:avLst/>
-          </a:prstGeom>
-          <a:noFill/>
-        </p:spPr>
-        <p:txBody>
-          <a:bodyPr wrap="square">
-            <a:spAutoFit/>
-          </a:bodyPr>
-          <a:lstStyle/>
-          <a:p>
-            <a:pPr>
-              <a:spcAft>
-                <a:spcPts val="700"/>
-              </a:spcAft>
-            </a:pPr>
-            <a:r>
-              <a:rPr sz="1900" b="1" i="0">
-                <a:solidFill>
-                  <a:srgbClr val="006E96"/>
-                </a:solidFill>
-                <a:latin typeface="Arial"/>
-              </a:rPr>
-              <a:t>Shared platforms</a:t>
-            </a:r>
-          </a:p>
-          <a:p>
-            <a:pPr>
-              <a:spcAft>
-                <a:spcPts val="700"/>
-              </a:spcAft>
-            </a:pPr>
-            <a:r>
-              <a:rPr sz="1600" b="0" i="0">
-                <a:solidFill>
-                  <a:srgbClr val="1A1A1A"/>
-                </a:solidFill>
-                <a:latin typeface="Arial"/>
-              </a:rPr>
-              <a:t>Identity, payments, data exchange.</a:t>
-            </a:r>
-          </a:p>
-          <a:p>
-            <a:pPr>
-              <a:spcAft>
-                <a:spcPts val="700"/>
-              </a:spcAft>
-            </a:pPr>
-            <a:r>
-              <a:rPr sz="1600" b="0" i="0">
-                <a:solidFill>
-                  <a:srgbClr val="1A1A1A"/>
-                </a:solidFill>
-                <a:latin typeface="Arial"/>
-              </a:rPr>
-              <a:t>Used across many bodies.</a:t>
-            </a:r>
-          </a:p>
-          <a:p>
-            <a:pPr>
-              <a:spcAft>
-                <a:spcPts val="700"/>
-              </a:spcAft>
-            </a:pPr>
-            <a:r>
-              <a:rPr sz="1600" b="0" i="0">
-                <a:solidFill>
-                  <a:srgbClr val="1A1A1A"/>
-                </a:solidFill>
-                <a:latin typeface="Arial"/>
-              </a:rPr>
-              <a:t>Not policy units, not regulators, not service authorities.</a:t>
-            </a:r>
-          </a:p>
-        </p:txBody>
-      </p:sp>
-      <p:sp>
-        <p:nvSpPr>
-          <p:cNvPr id="8" name="TextBox 7"/>
-          <p:cNvSpPr txBox="1"/>
-          <p:nvPr/>
-        </p:nvSpPr>
-        <p:spPr>
-          <a:xfrm>
-            <a:off x="658368" y="5715000"/>
-            <a:ext cx="10881360" cy="548640"/>
-          </a:xfrm>
-          <a:prstGeom prst="rect">
-            <a:avLst/>
-          </a:prstGeom>
-          <a:noFill/>
-        </p:spPr>
-        <p:txBody>
-          <a:bodyPr wrap="square">
-            <a:spAutoFit/>
-          </a:bodyPr>
-          <a:lstStyle/>
-          <a:p>
-            <a:r>
-              <a:rPr sz="1550" b="1" i="0">
-                <a:solidFill>
-                  <a:srgbClr val="006E96"/>
-                </a:solidFill>
-                <a:latin typeface="Arial"/>
-              </a:rPr>
-              <a:t>Treat them as shared — not as the private property of whichever ministry happens to host them.</a:t>
-            </a:r>
-          </a:p>
-        </p:txBody>
-      </p:sp>
-      <p:sp>
-        <p:nvSpPr>
-          <p:cNvPr id="9" name="TextBox 8"/>
-          <p:cNvSpPr txBox="1"/>
-          <p:nvPr/>
-        </p:nvSpPr>
-        <p:spPr>
-          <a:xfrm>
-            <a:off x="457200" y="6473952"/>
-            <a:ext cx="7772400" cy="292608"/>
-          </a:xfrm>
-          <a:prstGeom prst="rect">
-            <a:avLst/>
-          </a:prstGeom>
-          <a:noFill/>
-        </p:spPr>
-        <p:txBody>
-          <a:bodyPr wrap="square">
-            <a:spAutoFit/>
-          </a:bodyPr>
-          <a:lstStyle/>
-          <a:p>
-            <a:r>
-              <a:rPr sz="900" b="0" i="0">
-                <a:solidFill>
-                  <a:srgbClr val="595959"/>
-                </a:solidFill>
-                <a:latin typeface="Arial"/>
-              </a:rPr>
-              <a:t>2.4 · Classify any public body before you model it</a:t>
-            </a:r>
-          </a:p>
-        </p:txBody>
-      </p:sp>
-    </p:spTree>
-  </p:cSld>
-  <p:clrMapOvr>
-    <a:masterClrMapping/>
-  </p:clrMapOvr>
-</p:sld>
-</file>
-
 <file path=ppt/slides/slide28.xml><?xml version="1.0" encoding="utf-8"?>
 <p:sld xmlns:a="http://schemas.openxmlformats.org/drawingml/2006/main" xmlns:p="http://schemas.openxmlformats.org/presentationml/2006/main" xmlns:r="http://schemas.openxmlformats.org/officeDocument/2006/relationships">
   <p:cSld>
@@ -13440,58 +11602,14 @@
       <p:grpSpPr/>
       <p:sp>
         <p:nvSpPr>
-          <p:cNvPr id="2" name="Rectangle 1"/>
-          <p:cNvSpPr/>
-          <p:nvPr/>
-        </p:nvSpPr>
-        <p:spPr>
-          <a:xfrm>
-            <a:off x="457200" y="384048"/>
-            <a:ext cx="45720" cy="256032"/>
-          </a:xfrm>
-          <a:prstGeom prst="rect">
-            <a:avLst/>
-          </a:prstGeom>
-          <a:solidFill>
-            <a:srgbClr val="009CD6"/>
-          </a:solidFill>
-          <a:ln>
-            <a:noFill/>
-          </a:ln>
-          <a:effectLst/>
-        </p:spPr>
-        <p:style>
-          <a:lnRef idx="1">
-            <a:schemeClr val="accent1"/>
-          </a:lnRef>
-          <a:fillRef idx="3">
-            <a:schemeClr val="accent1"/>
-          </a:fillRef>
-          <a:effectRef idx="2">
-            <a:schemeClr val="accent1"/>
-          </a:effectRef>
-          <a:fontRef idx="minor">
-            <a:schemeClr val="lt1"/>
-          </a:fontRef>
-        </p:style>
-        <p:txBody>
-          <a:bodyPr rtlCol="0" anchor="ctr"/>
-          <a:lstStyle/>
-          <a:p>
-            <a:pPr algn="ctr"/>
-          </a:p>
-        </p:txBody>
-      </p:sp>
-      <p:sp>
-        <p:nvSpPr>
-          <p:cNvPr id="3" name="TextBox 2"/>
+          <p:cNvPr id="2" name="TextBox 1"/>
           <p:cNvSpPr txBox="1"/>
           <p:nvPr/>
         </p:nvSpPr>
         <p:spPr>
           <a:xfrm>
-            <a:off x="621792" y="274320"/>
-            <a:ext cx="11247120" cy="914400"/>
+            <a:off x="822960" y="822960"/>
+            <a:ext cx="7315200" cy="457200"/>
           </a:xfrm>
           <a:prstGeom prst="rect">
             <a:avLst/>
@@ -13505,27 +11623,95 @@
           <a:lstStyle/>
           <a:p>
             <a:r>
-              <a:rPr sz="2800" b="1" i="0">
+              <a:rPr sz="1200" b="1" i="0">
+                <a:solidFill>
+                  <a:srgbClr val="595959"/>
+                </a:solidFill>
+                <a:latin typeface="Arial"/>
+              </a:rPr>
+              <a:t>KP1 · MODULE 2 · VIDEO 2.4</a:t>
+            </a:r>
+          </a:p>
+        </p:txBody>
+      </p:sp>
+      <p:sp>
+        <p:nvSpPr>
+          <p:cNvPr id="3" name="TextBox 2"/>
+          <p:cNvSpPr txBox="1"/>
+          <p:nvPr/>
+        </p:nvSpPr>
+        <p:spPr>
+          <a:xfrm>
+            <a:off x="822960" y="1828800"/>
+            <a:ext cx="2011680" cy="1097280"/>
+          </a:xfrm>
+          <a:prstGeom prst="rect">
+            <a:avLst/>
+          </a:prstGeom>
+          <a:noFill/>
+        </p:spPr>
+        <p:txBody>
+          <a:bodyPr wrap="square">
+            <a:spAutoFit/>
+          </a:bodyPr>
+          <a:lstStyle/>
+          <a:p>
+            <a:r>
+              <a:rPr sz="6000" b="1" i="0">
+                <a:solidFill>
+                  <a:srgbClr val="009CD6"/>
+                </a:solidFill>
+                <a:latin typeface="Arial"/>
+              </a:rPr>
+              <a:t>2.4</a:t>
+            </a:r>
+          </a:p>
+        </p:txBody>
+      </p:sp>
+      <p:sp>
+        <p:nvSpPr>
+          <p:cNvPr id="4" name="TextBox 3"/>
+          <p:cNvSpPr txBox="1"/>
+          <p:nvPr/>
+        </p:nvSpPr>
+        <p:spPr>
+          <a:xfrm>
+            <a:off x="822960" y="2880360"/>
+            <a:ext cx="9601200" cy="1371600"/>
+          </a:xfrm>
+          <a:prstGeom prst="rect">
+            <a:avLst/>
+          </a:prstGeom>
+          <a:noFill/>
+        </p:spPr>
+        <p:txBody>
+          <a:bodyPr wrap="square">
+            <a:spAutoFit/>
+          </a:bodyPr>
+          <a:lstStyle/>
+          <a:p>
+            <a:r>
+              <a:rPr sz="3400" b="1" i="0">
                 <a:solidFill>
                   <a:srgbClr val="1A1A1A"/>
                 </a:solidFill>
                 <a:latin typeface="Arial"/>
               </a:rPr>
-              <a:t>Each type comes with an expected profile</a:t>
+              <a:t>Classify any public body before you model it</a:t>
             </a:r>
           </a:p>
         </p:txBody>
       </p:sp>
       <p:sp>
         <p:nvSpPr>
-          <p:cNvPr id="4" name="TextBox 3"/>
+          <p:cNvPr id="5" name="TextBox 4"/>
           <p:cNvSpPr txBox="1"/>
           <p:nvPr/>
         </p:nvSpPr>
         <p:spPr>
           <a:xfrm>
-            <a:off x="658368" y="1600200"/>
-            <a:ext cx="10881360" cy="2651760"/>
+            <a:off x="822960" y="4343400"/>
+            <a:ext cx="9875520" cy="1554480"/>
           </a:xfrm>
           <a:prstGeom prst="rect">
             <a:avLst/>
@@ -13538,82 +11724,15 @@
           </a:bodyPr>
           <a:lstStyle/>
           <a:p>
-            <a:pPr>
-              <a:spcAft>
-                <a:spcPts val="1200"/>
-              </a:spcAft>
-            </a:pPr>
-            <a:r>
-              <a:rPr sz="2000" b="0" i="0">
+            <a:r>
+              <a:rPr sz="1700" b="0" i="1">
                 <a:solidFill>
-                  <a:srgbClr val="1A1A1A"/>
+                  <a:srgbClr val="595959"/>
                 </a:solidFill>
                 <a:latin typeface="Arial"/>
               </a:rPr>
-              <a:t>Name a body a regulatory agency, and you expect a licensing capability, a register of the regulated, an enforcement record, and an appeals process. You walk in confirming or correcting a profile — not building one from nothing.</a:t>
-            </a:r>
-          </a:p>
-          <a:p>
-            <a:pPr>
-              <a:spcAft>
-                <a:spcPts val="1200"/>
-              </a:spcAft>
-            </a:pPr>
-            <a:r>
-              <a:rPr sz="2000" b="0" i="0">
-                <a:solidFill>
-                  <a:srgbClr val="1A1A1A"/>
-                </a:solidFill>
-                <a:latin typeface="Arial"/>
-              </a:rPr>
-              <a:t>When a body that should be a neutral registry is acting like a policy unit and shaping rules to suit itself, the taxonomy is what lets you see it.</a:t>
-            </a:r>
-          </a:p>
-        </p:txBody>
-      </p:sp>
-      <p:sp>
-        <p:nvSpPr>
-          <p:cNvPr id="5" name="Rounded Rectangle 4"/>
-          <p:cNvSpPr/>
-          <p:nvPr/>
-        </p:nvSpPr>
-        <p:spPr>
-          <a:xfrm>
-            <a:off x="658368" y="4434840"/>
-            <a:ext cx="10881360" cy="1325880"/>
-          </a:xfrm>
-          <a:prstGeom prst="roundRect">
-            <a:avLst>
-              <a:gd name="adj" fmla="val 4500"/>
-            </a:avLst>
-          </a:prstGeom>
-          <a:solidFill>
-            <a:srgbClr val="009CD6"/>
-          </a:solidFill>
-          <a:ln>
-            <a:noFill/>
-          </a:ln>
-          <a:effectLst/>
-        </p:spPr>
-        <p:style>
-          <a:lnRef idx="1">
-            <a:schemeClr val="accent1"/>
-          </a:lnRef>
-          <a:fillRef idx="3">
-            <a:schemeClr val="accent1"/>
-          </a:fillRef>
-          <a:effectRef idx="2">
-            <a:schemeClr val="accent1"/>
-          </a:effectRef>
-          <a:fontRef idx="minor">
-            <a:schemeClr val="lt1"/>
-          </a:fontRef>
-        </p:style>
-        <p:txBody>
-          <a:bodyPr rtlCol="0" anchor="ctr"/>
-          <a:lstStyle/>
-          <a:p>
-            <a:pPr algn="ctr"/>
+              <a:t>PAERA publishes a taxonomy of public bodies — policy unit, regulatory agency, service-delivery authority, plus supporting elements like state registries. Classify a body first, and you already know what capabilities, data and governance to expect from it — before you interview anyone.</a:t>
+            </a:r>
           </a:p>
         </p:txBody>
       </p:sp>
@@ -13625,8 +11744,8 @@
         </p:nvSpPr>
         <p:spPr>
           <a:xfrm>
-            <a:off x="859536" y="4626864"/>
-            <a:ext cx="10479024" cy="1051560"/>
+            <a:off x="822960" y="5989320"/>
+            <a:ext cx="7315200" cy="365760"/>
           </a:xfrm>
           <a:prstGeom prst="rect">
             <a:avLst/>
@@ -13639,53 +11758,14 @@
           </a:bodyPr>
           <a:lstStyle/>
           <a:p>
-            <a:pPr>
-              <a:spcAft>
-                <a:spcPts val="700"/>
-              </a:spcAft>
-            </a:pPr>
-            <a:r>
-              <a:rPr sz="2300" b="1" i="0">
-                <a:solidFill>
-                  <a:srgbClr val="FFFFFF"/>
-                </a:solidFill>
-                <a:latin typeface="Arial"/>
-              </a:rPr>
-              <a:t>Misclassification is itself a finding.</a:t>
-            </a:r>
-          </a:p>
-        </p:txBody>
-      </p:sp>
-      <p:sp>
-        <p:nvSpPr>
-          <p:cNvPr id="7" name="TextBox 6"/>
-          <p:cNvSpPr txBox="1"/>
-          <p:nvPr/>
-        </p:nvSpPr>
-        <p:spPr>
-          <a:xfrm>
-            <a:off x="457200" y="6473952"/>
-            <a:ext cx="7772400" cy="292608"/>
-          </a:xfrm>
-          <a:prstGeom prst="rect">
-            <a:avLst/>
-          </a:prstGeom>
-          <a:noFill/>
-        </p:spPr>
-        <p:txBody>
-          <a:bodyPr wrap="square">
-            <a:spAutoFit/>
-          </a:bodyPr>
-          <a:lstStyle/>
-          <a:p>
-            <a:r>
-              <a:rPr sz="900" b="0" i="0">
+            <a:r>
+              <a:rPr sz="1200" b="0" i="0">
                 <a:solidFill>
                   <a:srgbClr val="595959"/>
                 </a:solidFill>
                 <a:latin typeface="Arial"/>
               </a:rPr>
-              <a:t>2.4 · Classify any public body before you model it</a:t>
+              <a:t>~4 minutes · standalone video · voice-over on text slides</a:t>
             </a:r>
           </a:p>
         </p:txBody>
@@ -13710,6 +11790,216 @@
       <p:grpSpPr/>
       <p:sp>
         <p:nvSpPr>
+          <p:cNvPr id="2" name="TextBox 1"/>
+          <p:cNvSpPr txBox="1"/>
+          <p:nvPr/>
+        </p:nvSpPr>
+        <p:spPr>
+          <a:xfrm>
+            <a:off x="1005840" y="1325880"/>
+            <a:ext cx="5486400" cy="365760"/>
+          </a:xfrm>
+          <a:prstGeom prst="rect">
+            <a:avLst/>
+          </a:prstGeom>
+          <a:noFill/>
+        </p:spPr>
+        <p:txBody>
+          <a:bodyPr wrap="square">
+            <a:spAutoFit/>
+          </a:bodyPr>
+          <a:lstStyle/>
+          <a:p>
+            <a:r>
+              <a:rPr sz="1200" b="1" i="0">
+                <a:solidFill>
+                  <a:srgbClr val="006E96"/>
+                </a:solidFill>
+                <a:latin typeface="Arial"/>
+              </a:rPr>
+              <a:t>WHERE WE START</a:t>
+            </a:r>
+          </a:p>
+        </p:txBody>
+      </p:sp>
+      <p:sp>
+        <p:nvSpPr>
+          <p:cNvPr id="3" name="TextBox 2"/>
+          <p:cNvSpPr txBox="1"/>
+          <p:nvPr/>
+        </p:nvSpPr>
+        <p:spPr>
+          <a:xfrm>
+            <a:off x="1005840" y="1783080"/>
+            <a:ext cx="10149840" cy="1737360"/>
+          </a:xfrm>
+          <a:prstGeom prst="rect">
+            <a:avLst/>
+          </a:prstGeom>
+          <a:noFill/>
+        </p:spPr>
+        <p:txBody>
+          <a:bodyPr wrap="square">
+            <a:spAutoFit/>
+          </a:bodyPr>
+          <a:lstStyle/>
+          <a:p>
+            <a:r>
+              <a:rPr sz="3000" b="1" i="0">
+                <a:solidFill>
+                  <a:srgbClr val="1A1A1A"/>
+                </a:solidFill>
+                <a:latin typeface="Arial"/>
+              </a:rPr>
+              <a:t>Classify the body before you model it.</a:t>
+            </a:r>
+          </a:p>
+        </p:txBody>
+      </p:sp>
+      <p:sp>
+        <p:nvSpPr>
+          <p:cNvPr id="4" name="TextBox 3"/>
+          <p:cNvSpPr txBox="1"/>
+          <p:nvPr/>
+        </p:nvSpPr>
+        <p:spPr>
+          <a:xfrm>
+            <a:off x="1005840" y="3611880"/>
+            <a:ext cx="10149840" cy="2377440"/>
+          </a:xfrm>
+          <a:prstGeom prst="rect">
+            <a:avLst/>
+          </a:prstGeom>
+          <a:noFill/>
+        </p:spPr>
+        <p:txBody>
+          <a:bodyPr wrap="square">
+            <a:spAutoFit/>
+          </a:bodyPr>
+          <a:lstStyle/>
+          <a:p>
+            <a:pPr>
+              <a:spcAft>
+                <a:spcPts val="800"/>
+              </a:spcAft>
+            </a:pPr>
+            <a:r>
+              <a:rPr sz="1700" b="0" i="0">
+                <a:solidFill>
+                  <a:srgbClr val="595959"/>
+                </a:solidFill>
+                <a:latin typeface="Arial"/>
+              </a:rPr>
+              <a:t>The kind of body tells you in advance what it does, what data it owns, and how it is governed.</a:t>
+            </a:r>
+          </a:p>
+          <a:p>
+            <a:pPr>
+              <a:spcAft>
+                <a:spcPts val="800"/>
+              </a:spcAft>
+            </a:pPr>
+            <a:r>
+              <a:rPr sz="1700" b="0" i="0">
+                <a:solidFill>
+                  <a:srgbClr val="595959"/>
+                </a:solidFill>
+                <a:latin typeface="Arial"/>
+              </a:rPr>
+              <a:t>PAERA publishes a taxonomy that sorts public bodies into a few types.</a:t>
+            </a:r>
+          </a:p>
+        </p:txBody>
+      </p:sp>
+      <p:sp>
+        <p:nvSpPr>
+          <p:cNvPr id="5" name="TextBox 4"/>
+          <p:cNvSpPr txBox="1"/>
+          <p:nvPr/>
+        </p:nvSpPr>
+        <p:spPr>
+          <a:xfrm>
+            <a:off x="457200" y="6473952"/>
+            <a:ext cx="7772400" cy="292608"/>
+          </a:xfrm>
+          <a:prstGeom prst="rect">
+            <a:avLst/>
+          </a:prstGeom>
+          <a:noFill/>
+        </p:spPr>
+        <p:txBody>
+          <a:bodyPr wrap="square">
+            <a:spAutoFit/>
+          </a:bodyPr>
+          <a:lstStyle/>
+          <a:p>
+            <a:r>
+              <a:rPr sz="900" b="0" i="0">
+                <a:solidFill>
+                  <a:srgbClr val="595959"/>
+                </a:solidFill>
+                <a:latin typeface="Arial"/>
+              </a:rPr>
+              <a:t>2.4 · Classify any public body before you model it</a:t>
+            </a:r>
+          </a:p>
+        </p:txBody>
+      </p:sp>
+      <p:sp>
+        <p:nvSpPr>
+          <p:cNvPr id="6" name="TextBox 5"/>
+          <p:cNvSpPr txBox="1"/>
+          <p:nvPr/>
+        </p:nvSpPr>
+        <p:spPr>
+          <a:xfrm>
+            <a:off x="10058400" y="6473952"/>
+            <a:ext cx="1673352" cy="292608"/>
+          </a:xfrm>
+          <a:prstGeom prst="rect">
+            <a:avLst/>
+          </a:prstGeom>
+          <a:noFill/>
+        </p:spPr>
+        <p:txBody>
+          <a:bodyPr wrap="square">
+            <a:spAutoFit/>
+          </a:bodyPr>
+          <a:lstStyle/>
+          <a:p>
+            <a:pPr algn="r"/>
+            <a:r>
+              <a:rPr sz="900" b="0" i="0">
+                <a:solidFill>
+                  <a:srgbClr val="595959"/>
+                </a:solidFill>
+                <a:latin typeface="Arial"/>
+              </a:rPr>
+              <a:t>www.itu.int</a:t>
+            </a:r>
+          </a:p>
+        </p:txBody>
+      </p:sp>
+    </p:spTree>
+  </p:cSld>
+  <p:clrMapOvr>
+    <a:masterClrMapping/>
+  </p:clrMapOvr>
+</p:sld>
+</file>
+
+<file path=ppt/slides/slide30.xml><?xml version="1.0" encoding="utf-8"?>
+<p:sld xmlns:a="http://schemas.openxmlformats.org/drawingml/2006/main" xmlns:p="http://schemas.openxmlformats.org/presentationml/2006/main" xmlns:r="http://schemas.openxmlformats.org/officeDocument/2006/relationships">
+  <p:cSld>
+    <p:spTree>
+      <p:nvGrpSpPr>
+        <p:cNvPr id="1" name=""/>
+        <p:cNvGrpSpPr/>
+        <p:nvPr/>
+      </p:nvGrpSpPr>
+      <p:grpSpPr/>
+      <p:sp>
+        <p:nvSpPr>
           <p:cNvPr id="2" name="Rectangle 1"/>
           <p:cNvSpPr/>
           <p:nvPr/>
@@ -13781,82 +12071,29 @@
                 </a:solidFill>
                 <a:latin typeface="Arial"/>
               </a:rPr>
-              <a:t>It is already published — adopt it</a:t>
+              <a:t>Three types cover most of government</a:t>
             </a:r>
           </a:p>
         </p:txBody>
       </p:sp>
       <p:sp>
         <p:nvSpPr>
-          <p:cNvPr id="4" name="TextBox 3"/>
-          <p:cNvSpPr txBox="1"/>
-          <p:nvPr/>
-        </p:nvSpPr>
-        <p:spPr>
-          <a:xfrm>
-            <a:off x="658368" y="1554480"/>
-            <a:ext cx="10984687" cy="1188720"/>
-          </a:xfrm>
-          <a:prstGeom prst="rect">
-            <a:avLst/>
-          </a:prstGeom>
-          <a:noFill/>
-        </p:spPr>
-        <p:txBody>
-          <a:bodyPr wrap="square">
-            <a:spAutoFit/>
-          </a:bodyPr>
-          <a:lstStyle/>
-          <a:p>
-            <a:pPr>
-              <a:spcAft>
-                <a:spcPts val="300"/>
-              </a:spcAft>
-            </a:pPr>
-            <a:r>
-              <a:rPr sz="1900" b="1" i="0">
-                <a:solidFill>
-                  <a:srgbClr val="1A1A1A"/>
-                </a:solidFill>
-                <a:latin typeface="Arial"/>
-              </a:rPr>
-              <a:t>PAERA §4.6, with the detail in Annex A1.2</a:t>
-            </a:r>
-          </a:p>
-          <a:p>
-            <a:pPr>
-              <a:spcAft>
-                <a:spcPts val="300"/>
-              </a:spcAft>
-            </a:pPr>
-            <a:r>
-              <a:rPr sz="1550" b="0" i="0">
-                <a:solidFill>
-                  <a:srgbClr val="595959"/>
-                </a:solidFill>
-                <a:latin typeface="Arial"/>
-              </a:rPr>
-              <a:t>You do not invent a classification scheme for your country.</a:t>
-            </a:r>
-          </a:p>
-        </p:txBody>
-      </p:sp>
-      <p:sp>
-        <p:nvSpPr>
-          <p:cNvPr id="5" name="Rectangle 4"/>
+          <p:cNvPr id="4" name="Rounded Rectangle 3"/>
           <p:cNvSpPr/>
           <p:nvPr/>
         </p:nvSpPr>
         <p:spPr>
           <a:xfrm>
-            <a:off x="621792" y="2747772"/>
-            <a:ext cx="10881360" cy="12700"/>
-          </a:xfrm>
-          <a:prstGeom prst="rect">
-            <a:avLst/>
+            <a:off x="658368" y="1554480"/>
+            <a:ext cx="3566160" cy="3886200"/>
+          </a:xfrm>
+          <a:prstGeom prst="roundRect">
+            <a:avLst>
+              <a:gd name="adj" fmla="val 4500"/>
+            </a:avLst>
           </a:prstGeom>
           <a:solidFill>
-            <a:srgbClr val="DDECF4"/>
+            <a:srgbClr val="E5F5FB"/>
           </a:solidFill>
           <a:ln>
             <a:noFill/>
@@ -13887,14 +12124,14 @@
       </p:sp>
       <p:sp>
         <p:nvSpPr>
-          <p:cNvPr id="6" name="TextBox 5"/>
+          <p:cNvPr id="5" name="TextBox 4"/>
           <p:cNvSpPr txBox="1"/>
           <p:nvPr/>
         </p:nvSpPr>
         <p:spPr>
           <a:xfrm>
-            <a:off x="658368" y="2788920"/>
-            <a:ext cx="10984687" cy="1188720"/>
+            <a:off x="859536" y="1700784"/>
+            <a:ext cx="3163824" cy="3611880"/>
           </a:xfrm>
           <a:prstGeom prst="rect">
             <a:avLst/>
@@ -13909,40 +12146,372 @@
           <a:p>
             <a:pPr>
               <a:spcAft>
-                <a:spcPts val="300"/>
+                <a:spcPts val="700"/>
               </a:spcAft>
             </a:pPr>
             <a:r>
               <a:rPr sz="1900" b="1" i="0">
+                <a:solidFill>
+                  <a:srgbClr val="006E96"/>
+                </a:solidFill>
+                <a:latin typeface="Arial"/>
+              </a:rPr>
+              <a:t>Policy unit</a:t>
+            </a:r>
+          </a:p>
+          <a:p>
+            <a:pPr>
+              <a:spcAft>
+                <a:spcPts val="700"/>
+              </a:spcAft>
+            </a:pPr>
+            <a:r>
+              <a:rPr sz="1500" b="0" i="0">
                 <a:solidFill>
                   <a:srgbClr val="1A1A1A"/>
                 </a:solidFill>
                 <a:latin typeface="Arial"/>
               </a:rPr>
-              <a:t>Extend it only where your country has a body type it genuinely does not cover</a:t>
+              <a:t>Sets policy, owns the rules.</a:t>
             </a:r>
           </a:p>
           <a:p>
             <a:pPr>
               <a:spcAft>
-                <a:spcPts val="300"/>
+                <a:spcPts val="700"/>
               </a:spcAft>
             </a:pPr>
             <a:r>
-              <a:rPr sz="1550" b="0" i="0">
+              <a:rPr sz="1500" b="0" i="0">
                 <a:solidFill>
-                  <a:srgbClr val="595959"/>
+                  <a:srgbClr val="1A1A1A"/>
                 </a:solidFill>
                 <a:latin typeface="Arial"/>
               </a:rPr>
-              <a:t>When you say “service-delivery authority”, every other architect in the country pictures the same thing.</a:t>
+              <a:t>Does not run services at scale — it decides what the services should be.</a:t>
+            </a:r>
+          </a:p>
+          <a:p>
+            <a:pPr>
+              <a:spcAft>
+                <a:spcPts val="700"/>
+              </a:spcAft>
+            </a:pPr>
+            <a:r>
+              <a:rPr sz="1500" b="0" i="0">
+                <a:solidFill>
+                  <a:srgbClr val="1A1A1A"/>
+                </a:solidFill>
+                <a:latin typeface="Arial"/>
+              </a:rPr>
+              <a:t>Usually a ministry’s core.</a:t>
             </a:r>
           </a:p>
         </p:txBody>
       </p:sp>
       <p:sp>
         <p:nvSpPr>
+          <p:cNvPr id="6" name="Rounded Rectangle 5"/>
+          <p:cNvSpPr/>
+          <p:nvPr/>
+        </p:nvSpPr>
+        <p:spPr>
+          <a:xfrm>
+            <a:off x="4407407" y="1554480"/>
+            <a:ext cx="3566160" cy="3886200"/>
+          </a:xfrm>
+          <a:prstGeom prst="roundRect">
+            <a:avLst>
+              <a:gd name="adj" fmla="val 4500"/>
+            </a:avLst>
+          </a:prstGeom>
+          <a:solidFill>
+            <a:srgbClr val="E5F5FB"/>
+          </a:solidFill>
+          <a:ln>
+            <a:noFill/>
+          </a:ln>
+          <a:effectLst/>
+        </p:spPr>
+        <p:style>
+          <a:lnRef idx="1">
+            <a:schemeClr val="accent1"/>
+          </a:lnRef>
+          <a:fillRef idx="3">
+            <a:schemeClr val="accent1"/>
+          </a:fillRef>
+          <a:effectRef idx="2">
+            <a:schemeClr val="accent1"/>
+          </a:effectRef>
+          <a:fontRef idx="minor">
+            <a:schemeClr val="lt1"/>
+          </a:fontRef>
+        </p:style>
+        <p:txBody>
+          <a:bodyPr rtlCol="0" anchor="ctr"/>
+          <a:lstStyle/>
+          <a:p>
+            <a:pPr algn="ctr"/>
+          </a:p>
+        </p:txBody>
+      </p:sp>
+      <p:sp>
+        <p:nvSpPr>
           <p:cNvPr id="7" name="TextBox 6"/>
+          <p:cNvSpPr txBox="1"/>
+          <p:nvPr/>
+        </p:nvSpPr>
+        <p:spPr>
+          <a:xfrm>
+            <a:off x="4608575" y="1700784"/>
+            <a:ext cx="3163824" cy="3611880"/>
+          </a:xfrm>
+          <a:prstGeom prst="rect">
+            <a:avLst/>
+          </a:prstGeom>
+          <a:noFill/>
+        </p:spPr>
+        <p:txBody>
+          <a:bodyPr wrap="square">
+            <a:spAutoFit/>
+          </a:bodyPr>
+          <a:lstStyle/>
+          <a:p>
+            <a:pPr>
+              <a:spcAft>
+                <a:spcPts val="700"/>
+              </a:spcAft>
+            </a:pPr>
+            <a:r>
+              <a:rPr sz="1900" b="1" i="0">
+                <a:solidFill>
+                  <a:srgbClr val="006E96"/>
+                </a:solidFill>
+                <a:latin typeface="Arial"/>
+              </a:rPr>
+              <a:t>Regulatory agency</a:t>
+            </a:r>
+          </a:p>
+          <a:p>
+            <a:pPr>
+              <a:spcAft>
+                <a:spcPts val="700"/>
+              </a:spcAft>
+            </a:pPr>
+            <a:r>
+              <a:rPr sz="1500" b="0" i="0">
+                <a:solidFill>
+                  <a:srgbClr val="1A1A1A"/>
+                </a:solidFill>
+                <a:latin typeface="Arial"/>
+              </a:rPr>
+              <a:t>Licenses, supervises, enforces.</a:t>
+            </a:r>
+          </a:p>
+          <a:p>
+            <a:pPr>
+              <a:spcAft>
+                <a:spcPts val="700"/>
+              </a:spcAft>
+            </a:pPr>
+            <a:r>
+              <a:rPr sz="1500" b="0" i="0">
+                <a:solidFill>
+                  <a:srgbClr val="1A1A1A"/>
+                </a:solidFill>
+                <a:latin typeface="Arial"/>
+              </a:rPr>
+              <a:t>Holds registers of the things it regulates and records of its decisions.</a:t>
+            </a:r>
+          </a:p>
+          <a:p>
+            <a:pPr>
+              <a:spcAft>
+                <a:spcPts val="700"/>
+              </a:spcAft>
+            </a:pPr>
+            <a:r>
+              <a:rPr sz="1500" b="0" i="0">
+                <a:solidFill>
+                  <a:srgbClr val="1A1A1A"/>
+                </a:solidFill>
+                <a:latin typeface="Arial"/>
+              </a:rPr>
+              <a:t>Expect an appeals process.</a:t>
+            </a:r>
+          </a:p>
+        </p:txBody>
+      </p:sp>
+      <p:sp>
+        <p:nvSpPr>
+          <p:cNvPr id="8" name="Rounded Rectangle 7"/>
+          <p:cNvSpPr/>
+          <p:nvPr/>
+        </p:nvSpPr>
+        <p:spPr>
+          <a:xfrm>
+            <a:off x="8156448" y="1554480"/>
+            <a:ext cx="3566160" cy="3886200"/>
+          </a:xfrm>
+          <a:prstGeom prst="roundRect">
+            <a:avLst>
+              <a:gd name="adj" fmla="val 4500"/>
+            </a:avLst>
+          </a:prstGeom>
+          <a:solidFill>
+            <a:srgbClr val="E5F5FB"/>
+          </a:solidFill>
+          <a:ln>
+            <a:noFill/>
+          </a:ln>
+          <a:effectLst/>
+        </p:spPr>
+        <p:style>
+          <a:lnRef idx="1">
+            <a:schemeClr val="accent1"/>
+          </a:lnRef>
+          <a:fillRef idx="3">
+            <a:schemeClr val="accent1"/>
+          </a:fillRef>
+          <a:effectRef idx="2">
+            <a:schemeClr val="accent1"/>
+          </a:effectRef>
+          <a:fontRef idx="minor">
+            <a:schemeClr val="lt1"/>
+          </a:fontRef>
+        </p:style>
+        <p:txBody>
+          <a:bodyPr rtlCol="0" anchor="ctr"/>
+          <a:lstStyle/>
+          <a:p>
+            <a:pPr algn="ctr"/>
+          </a:p>
+        </p:txBody>
+      </p:sp>
+      <p:sp>
+        <p:nvSpPr>
+          <p:cNvPr id="9" name="TextBox 8"/>
+          <p:cNvSpPr txBox="1"/>
+          <p:nvPr/>
+        </p:nvSpPr>
+        <p:spPr>
+          <a:xfrm>
+            <a:off x="8357616" y="1700784"/>
+            <a:ext cx="3163824" cy="3611880"/>
+          </a:xfrm>
+          <a:prstGeom prst="rect">
+            <a:avLst/>
+          </a:prstGeom>
+          <a:noFill/>
+        </p:spPr>
+        <p:txBody>
+          <a:bodyPr wrap="square">
+            <a:spAutoFit/>
+          </a:bodyPr>
+          <a:lstStyle/>
+          <a:p>
+            <a:pPr>
+              <a:spcAft>
+                <a:spcPts val="700"/>
+              </a:spcAft>
+            </a:pPr>
+            <a:r>
+              <a:rPr sz="1900" b="1" i="0">
+                <a:solidFill>
+                  <a:srgbClr val="006E96"/>
+                </a:solidFill>
+                <a:latin typeface="Arial"/>
+              </a:rPr>
+              <a:t>Service-delivery authority</a:t>
+            </a:r>
+          </a:p>
+          <a:p>
+            <a:pPr>
+              <a:spcAft>
+                <a:spcPts val="700"/>
+              </a:spcAft>
+            </a:pPr>
+            <a:r>
+              <a:rPr sz="1500" b="0" i="0">
+                <a:solidFill>
+                  <a:srgbClr val="1A1A1A"/>
+                </a:solidFill>
+                <a:latin typeface="Arial"/>
+              </a:rPr>
+              <a:t>Runs services to citizens at scale.</a:t>
+            </a:r>
+          </a:p>
+          <a:p>
+            <a:pPr>
+              <a:spcAft>
+                <a:spcPts val="700"/>
+              </a:spcAft>
+            </a:pPr>
+            <a:r>
+              <a:rPr sz="1500" b="0" i="0">
+                <a:solidFill>
+                  <a:srgbClr val="1A1A1A"/>
+                </a:solidFill>
+                <a:latin typeface="Arial"/>
+              </a:rPr>
+              <a:t>Has the queues, the case files, the front-line systems.</a:t>
+            </a:r>
+          </a:p>
+          <a:p>
+            <a:pPr>
+              <a:spcAft>
+                <a:spcPts val="700"/>
+              </a:spcAft>
+            </a:pPr>
+            <a:r>
+              <a:rPr sz="1500" b="0" i="0">
+                <a:solidFill>
+                  <a:srgbClr val="1A1A1A"/>
+                </a:solidFill>
+                <a:latin typeface="Arial"/>
+              </a:rPr>
+              <a:t>Expect high transaction volumes.</a:t>
+            </a:r>
+          </a:p>
+        </p:txBody>
+      </p:sp>
+      <p:sp>
+        <p:nvSpPr>
+          <p:cNvPr id="10" name="TextBox 9"/>
+          <p:cNvSpPr txBox="1"/>
+          <p:nvPr/>
+        </p:nvSpPr>
+        <p:spPr>
+          <a:xfrm>
+            <a:off x="658368" y="5577840"/>
+            <a:ext cx="10881360" cy="640080"/>
+          </a:xfrm>
+          <a:prstGeom prst="rect">
+            <a:avLst/>
+          </a:prstGeom>
+          <a:noFill/>
+        </p:spPr>
+        <p:txBody>
+          <a:bodyPr wrap="square">
+            <a:spAutoFit/>
+          </a:bodyPr>
+          <a:lstStyle/>
+          <a:p>
+            <a:r>
+              <a:rPr sz="1500" b="1" i="0">
+                <a:solidFill>
+                  <a:srgbClr val="006E96"/>
+                </a:solidFill>
+                <a:latin typeface="Arial"/>
+              </a:rPr>
+              <a:t>Tell me which of the three a body is, and I can already guess its main capabilities and data domains before I meet anyone.</a:t>
+            </a:r>
+          </a:p>
+        </p:txBody>
+      </p:sp>
+      <p:sp>
+        <p:nvSpPr>
+          <p:cNvPr id="11" name="TextBox 10"/>
           <p:cNvSpPr txBox="1"/>
           <p:nvPr/>
         </p:nvSpPr>
@@ -13982,7 +12551,991 @@
 </p:sld>
 </file>
 
-<file path=ppt/slides/slide30.xml><?xml version="1.0" encoding="utf-8"?>
+<file path=ppt/slides/slide31.xml><?xml version="1.0" encoding="utf-8"?>
+<p:sld xmlns:a="http://schemas.openxmlformats.org/drawingml/2006/main" xmlns:p="http://schemas.openxmlformats.org/presentationml/2006/main" xmlns:r="http://schemas.openxmlformats.org/officeDocument/2006/relationships">
+  <p:cSld>
+    <p:spTree>
+      <p:nvGrpSpPr>
+        <p:cNvPr id="1" name=""/>
+        <p:cNvGrpSpPr/>
+        <p:nvPr/>
+      </p:nvGrpSpPr>
+      <p:grpSpPr/>
+      <p:sp>
+        <p:nvSpPr>
+          <p:cNvPr id="2" name="Rectangle 1"/>
+          <p:cNvSpPr/>
+          <p:nvPr/>
+        </p:nvSpPr>
+        <p:spPr>
+          <a:xfrm>
+            <a:off x="457200" y="384048"/>
+            <a:ext cx="45720" cy="256032"/>
+          </a:xfrm>
+          <a:prstGeom prst="rect">
+            <a:avLst/>
+          </a:prstGeom>
+          <a:solidFill>
+            <a:srgbClr val="009CD6"/>
+          </a:solidFill>
+          <a:ln>
+            <a:noFill/>
+          </a:ln>
+          <a:effectLst/>
+        </p:spPr>
+        <p:style>
+          <a:lnRef idx="1">
+            <a:schemeClr val="accent1"/>
+          </a:lnRef>
+          <a:fillRef idx="3">
+            <a:schemeClr val="accent1"/>
+          </a:fillRef>
+          <a:effectRef idx="2">
+            <a:schemeClr val="accent1"/>
+          </a:effectRef>
+          <a:fontRef idx="minor">
+            <a:schemeClr val="lt1"/>
+          </a:fontRef>
+        </p:style>
+        <p:txBody>
+          <a:bodyPr rtlCol="0" anchor="ctr"/>
+          <a:lstStyle/>
+          <a:p>
+            <a:pPr algn="ctr"/>
+          </a:p>
+        </p:txBody>
+      </p:sp>
+      <p:sp>
+        <p:nvSpPr>
+          <p:cNvPr id="3" name="TextBox 2"/>
+          <p:cNvSpPr txBox="1"/>
+          <p:nvPr/>
+        </p:nvSpPr>
+        <p:spPr>
+          <a:xfrm>
+            <a:off x="621792" y="274320"/>
+            <a:ext cx="11247120" cy="914400"/>
+          </a:xfrm>
+          <a:prstGeom prst="rect">
+            <a:avLst/>
+          </a:prstGeom>
+          <a:noFill/>
+        </p:spPr>
+        <p:txBody>
+          <a:bodyPr wrap="square">
+            <a:spAutoFit/>
+          </a:bodyPr>
+          <a:lstStyle/>
+          <a:p>
+            <a:r>
+              <a:rPr sz="2800" b="1" i="0">
+                <a:solidFill>
+                  <a:srgbClr val="1A1A1A"/>
+                </a:solidFill>
+                <a:latin typeface="Arial"/>
+              </a:rPr>
+              <a:t>Around those three sit the foundations everyone else stands on</a:t>
+            </a:r>
+          </a:p>
+        </p:txBody>
+      </p:sp>
+      <p:sp>
+        <p:nvSpPr>
+          <p:cNvPr id="4" name="Rounded Rectangle 3"/>
+          <p:cNvSpPr/>
+          <p:nvPr/>
+        </p:nvSpPr>
+        <p:spPr>
+          <a:xfrm>
+            <a:off x="658368" y="1554480"/>
+            <a:ext cx="5394960" cy="3977639"/>
+          </a:xfrm>
+          <a:prstGeom prst="roundRect">
+            <a:avLst>
+              <a:gd name="adj" fmla="val 4500"/>
+            </a:avLst>
+          </a:prstGeom>
+          <a:solidFill>
+            <a:srgbClr val="E5F5FB"/>
+          </a:solidFill>
+          <a:ln>
+            <a:noFill/>
+          </a:ln>
+          <a:effectLst/>
+        </p:spPr>
+        <p:style>
+          <a:lnRef idx="1">
+            <a:schemeClr val="accent1"/>
+          </a:lnRef>
+          <a:fillRef idx="3">
+            <a:schemeClr val="accent1"/>
+          </a:fillRef>
+          <a:effectRef idx="2">
+            <a:schemeClr val="accent1"/>
+          </a:effectRef>
+          <a:fontRef idx="minor">
+            <a:schemeClr val="lt1"/>
+          </a:fontRef>
+        </p:style>
+        <p:txBody>
+          <a:bodyPr rtlCol="0" anchor="ctr"/>
+          <a:lstStyle/>
+          <a:p>
+            <a:pPr algn="ctr"/>
+          </a:p>
+        </p:txBody>
+      </p:sp>
+      <p:sp>
+        <p:nvSpPr>
+          <p:cNvPr id="5" name="TextBox 4"/>
+          <p:cNvSpPr txBox="1"/>
+          <p:nvPr/>
+        </p:nvSpPr>
+        <p:spPr>
+          <a:xfrm>
+            <a:off x="859536" y="1700784"/>
+            <a:ext cx="4992624" cy="3703320"/>
+          </a:xfrm>
+          <a:prstGeom prst="rect">
+            <a:avLst/>
+          </a:prstGeom>
+          <a:noFill/>
+        </p:spPr>
+        <p:txBody>
+          <a:bodyPr wrap="square">
+            <a:spAutoFit/>
+          </a:bodyPr>
+          <a:lstStyle/>
+          <a:p>
+            <a:pPr>
+              <a:spcAft>
+                <a:spcPts val="700"/>
+              </a:spcAft>
+            </a:pPr>
+            <a:r>
+              <a:rPr sz="1900" b="1" i="0">
+                <a:solidFill>
+                  <a:srgbClr val="006E96"/>
+                </a:solidFill>
+                <a:latin typeface="Arial"/>
+              </a:rPr>
+              <a:t>State registries</a:t>
+            </a:r>
+          </a:p>
+          <a:p>
+            <a:pPr>
+              <a:spcAft>
+                <a:spcPts val="700"/>
+              </a:spcAft>
+            </a:pPr>
+            <a:r>
+              <a:rPr sz="1600" b="0" i="0">
+                <a:solidFill>
+                  <a:srgbClr val="1A1A1A"/>
+                </a:solidFill>
+                <a:latin typeface="Arial"/>
+              </a:rPr>
+              <a:t>The authoritative single source for a kind of thing:</a:t>
+            </a:r>
+          </a:p>
+          <a:p>
+            <a:pPr>
+              <a:spcAft>
+                <a:spcPts val="700"/>
+              </a:spcAft>
+            </a:pPr>
+            <a:r>
+              <a:rPr sz="1600" b="0" i="0">
+                <a:solidFill>
+                  <a:srgbClr val="1A1A1A"/>
+                </a:solidFill>
+                <a:latin typeface="Arial"/>
+              </a:rPr>
+              <a:t>person · business · land · learner.</a:t>
+            </a:r>
+          </a:p>
+          <a:p>
+            <a:pPr>
+              <a:spcAft>
+                <a:spcPts val="700"/>
+              </a:spcAft>
+            </a:pPr>
+            <a:r>
+              <a:rPr sz="1600" b="0" i="0">
+                <a:solidFill>
+                  <a:srgbClr val="1A1A1A"/>
+                </a:solidFill>
+                <a:latin typeface="Arial"/>
+              </a:rPr>
+              <a:t>A registry’s whole job is to be the one place the truth lives.</a:t>
+            </a:r>
+          </a:p>
+        </p:txBody>
+      </p:sp>
+      <p:sp>
+        <p:nvSpPr>
+          <p:cNvPr id="6" name="Rounded Rectangle 5"/>
+          <p:cNvSpPr/>
+          <p:nvPr/>
+        </p:nvSpPr>
+        <p:spPr>
+          <a:xfrm>
+            <a:off x="6263640" y="1554480"/>
+            <a:ext cx="5394960" cy="3977639"/>
+          </a:xfrm>
+          <a:prstGeom prst="roundRect">
+            <a:avLst>
+              <a:gd name="adj" fmla="val 4500"/>
+            </a:avLst>
+          </a:prstGeom>
+          <a:solidFill>
+            <a:srgbClr val="E5F5FB"/>
+          </a:solidFill>
+          <a:ln>
+            <a:noFill/>
+          </a:ln>
+          <a:effectLst/>
+        </p:spPr>
+        <p:style>
+          <a:lnRef idx="1">
+            <a:schemeClr val="accent1"/>
+          </a:lnRef>
+          <a:fillRef idx="3">
+            <a:schemeClr val="accent1"/>
+          </a:fillRef>
+          <a:effectRef idx="2">
+            <a:schemeClr val="accent1"/>
+          </a:effectRef>
+          <a:fontRef idx="minor">
+            <a:schemeClr val="lt1"/>
+          </a:fontRef>
+        </p:style>
+        <p:txBody>
+          <a:bodyPr rtlCol="0" anchor="ctr"/>
+          <a:lstStyle/>
+          <a:p>
+            <a:pPr algn="ctr"/>
+          </a:p>
+        </p:txBody>
+      </p:sp>
+      <p:sp>
+        <p:nvSpPr>
+          <p:cNvPr id="7" name="TextBox 6"/>
+          <p:cNvSpPr txBox="1"/>
+          <p:nvPr/>
+        </p:nvSpPr>
+        <p:spPr>
+          <a:xfrm>
+            <a:off x="6464808" y="1700784"/>
+            <a:ext cx="4992624" cy="3703320"/>
+          </a:xfrm>
+          <a:prstGeom prst="rect">
+            <a:avLst/>
+          </a:prstGeom>
+          <a:noFill/>
+        </p:spPr>
+        <p:txBody>
+          <a:bodyPr wrap="square">
+            <a:spAutoFit/>
+          </a:bodyPr>
+          <a:lstStyle/>
+          <a:p>
+            <a:pPr>
+              <a:spcAft>
+                <a:spcPts val="700"/>
+              </a:spcAft>
+            </a:pPr>
+            <a:r>
+              <a:rPr sz="1900" b="1" i="0">
+                <a:solidFill>
+                  <a:srgbClr val="006E96"/>
+                </a:solidFill>
+                <a:latin typeface="Arial"/>
+              </a:rPr>
+              <a:t>Shared platforms</a:t>
+            </a:r>
+          </a:p>
+          <a:p>
+            <a:pPr>
+              <a:spcAft>
+                <a:spcPts val="700"/>
+              </a:spcAft>
+            </a:pPr>
+            <a:r>
+              <a:rPr sz="1600" b="0" i="0">
+                <a:solidFill>
+                  <a:srgbClr val="1A1A1A"/>
+                </a:solidFill>
+                <a:latin typeface="Arial"/>
+              </a:rPr>
+              <a:t>Identity, payments, data exchange.</a:t>
+            </a:r>
+          </a:p>
+          <a:p>
+            <a:pPr>
+              <a:spcAft>
+                <a:spcPts val="700"/>
+              </a:spcAft>
+            </a:pPr>
+            <a:r>
+              <a:rPr sz="1600" b="0" i="0">
+                <a:solidFill>
+                  <a:srgbClr val="1A1A1A"/>
+                </a:solidFill>
+                <a:latin typeface="Arial"/>
+              </a:rPr>
+              <a:t>Used across many bodies.</a:t>
+            </a:r>
+          </a:p>
+          <a:p>
+            <a:pPr>
+              <a:spcAft>
+                <a:spcPts val="700"/>
+              </a:spcAft>
+            </a:pPr>
+            <a:r>
+              <a:rPr sz="1600" b="0" i="0">
+                <a:solidFill>
+                  <a:srgbClr val="1A1A1A"/>
+                </a:solidFill>
+                <a:latin typeface="Arial"/>
+              </a:rPr>
+              <a:t>Not policy units, not regulators, not service authorities.</a:t>
+            </a:r>
+          </a:p>
+        </p:txBody>
+      </p:sp>
+      <p:sp>
+        <p:nvSpPr>
+          <p:cNvPr id="8" name="TextBox 7"/>
+          <p:cNvSpPr txBox="1"/>
+          <p:nvPr/>
+        </p:nvSpPr>
+        <p:spPr>
+          <a:xfrm>
+            <a:off x="658368" y="5715000"/>
+            <a:ext cx="10881360" cy="548640"/>
+          </a:xfrm>
+          <a:prstGeom prst="rect">
+            <a:avLst/>
+          </a:prstGeom>
+          <a:noFill/>
+        </p:spPr>
+        <p:txBody>
+          <a:bodyPr wrap="square">
+            <a:spAutoFit/>
+          </a:bodyPr>
+          <a:lstStyle/>
+          <a:p>
+            <a:r>
+              <a:rPr sz="1550" b="1" i="0">
+                <a:solidFill>
+                  <a:srgbClr val="006E96"/>
+                </a:solidFill>
+                <a:latin typeface="Arial"/>
+              </a:rPr>
+              <a:t>Treat them as shared — not as the private property of whichever ministry happens to host them.</a:t>
+            </a:r>
+          </a:p>
+        </p:txBody>
+      </p:sp>
+      <p:sp>
+        <p:nvSpPr>
+          <p:cNvPr id="9" name="TextBox 8"/>
+          <p:cNvSpPr txBox="1"/>
+          <p:nvPr/>
+        </p:nvSpPr>
+        <p:spPr>
+          <a:xfrm>
+            <a:off x="457200" y="6473952"/>
+            <a:ext cx="7772400" cy="292608"/>
+          </a:xfrm>
+          <a:prstGeom prst="rect">
+            <a:avLst/>
+          </a:prstGeom>
+          <a:noFill/>
+        </p:spPr>
+        <p:txBody>
+          <a:bodyPr wrap="square">
+            <a:spAutoFit/>
+          </a:bodyPr>
+          <a:lstStyle/>
+          <a:p>
+            <a:r>
+              <a:rPr sz="900" b="0" i="0">
+                <a:solidFill>
+                  <a:srgbClr val="595959"/>
+                </a:solidFill>
+                <a:latin typeface="Arial"/>
+              </a:rPr>
+              <a:t>2.4 · Classify any public body before you model it</a:t>
+            </a:r>
+          </a:p>
+        </p:txBody>
+      </p:sp>
+    </p:spTree>
+  </p:cSld>
+  <p:clrMapOvr>
+    <a:masterClrMapping/>
+  </p:clrMapOvr>
+</p:sld>
+</file>
+
+<file path=ppt/slides/slide32.xml><?xml version="1.0" encoding="utf-8"?>
+<p:sld xmlns:a="http://schemas.openxmlformats.org/drawingml/2006/main" xmlns:p="http://schemas.openxmlformats.org/presentationml/2006/main" xmlns:r="http://schemas.openxmlformats.org/officeDocument/2006/relationships">
+  <p:cSld>
+    <p:spTree>
+      <p:nvGrpSpPr>
+        <p:cNvPr id="1" name=""/>
+        <p:cNvGrpSpPr/>
+        <p:nvPr/>
+      </p:nvGrpSpPr>
+      <p:grpSpPr/>
+      <p:sp>
+        <p:nvSpPr>
+          <p:cNvPr id="2" name="Rectangle 1"/>
+          <p:cNvSpPr/>
+          <p:nvPr/>
+        </p:nvSpPr>
+        <p:spPr>
+          <a:xfrm>
+            <a:off x="457200" y="384048"/>
+            <a:ext cx="45720" cy="256032"/>
+          </a:xfrm>
+          <a:prstGeom prst="rect">
+            <a:avLst/>
+          </a:prstGeom>
+          <a:solidFill>
+            <a:srgbClr val="009CD6"/>
+          </a:solidFill>
+          <a:ln>
+            <a:noFill/>
+          </a:ln>
+          <a:effectLst/>
+        </p:spPr>
+        <p:style>
+          <a:lnRef idx="1">
+            <a:schemeClr val="accent1"/>
+          </a:lnRef>
+          <a:fillRef idx="3">
+            <a:schemeClr val="accent1"/>
+          </a:fillRef>
+          <a:effectRef idx="2">
+            <a:schemeClr val="accent1"/>
+          </a:effectRef>
+          <a:fontRef idx="minor">
+            <a:schemeClr val="lt1"/>
+          </a:fontRef>
+        </p:style>
+        <p:txBody>
+          <a:bodyPr rtlCol="0" anchor="ctr"/>
+          <a:lstStyle/>
+          <a:p>
+            <a:pPr algn="ctr"/>
+          </a:p>
+        </p:txBody>
+      </p:sp>
+      <p:sp>
+        <p:nvSpPr>
+          <p:cNvPr id="3" name="TextBox 2"/>
+          <p:cNvSpPr txBox="1"/>
+          <p:nvPr/>
+        </p:nvSpPr>
+        <p:spPr>
+          <a:xfrm>
+            <a:off x="621792" y="274320"/>
+            <a:ext cx="11247120" cy="914400"/>
+          </a:xfrm>
+          <a:prstGeom prst="rect">
+            <a:avLst/>
+          </a:prstGeom>
+          <a:noFill/>
+        </p:spPr>
+        <p:txBody>
+          <a:bodyPr wrap="square">
+            <a:spAutoFit/>
+          </a:bodyPr>
+          <a:lstStyle/>
+          <a:p>
+            <a:r>
+              <a:rPr sz="2800" b="1" i="0">
+                <a:solidFill>
+                  <a:srgbClr val="1A1A1A"/>
+                </a:solidFill>
+                <a:latin typeface="Arial"/>
+              </a:rPr>
+              <a:t>Each type comes with an expected profile</a:t>
+            </a:r>
+          </a:p>
+        </p:txBody>
+      </p:sp>
+      <p:sp>
+        <p:nvSpPr>
+          <p:cNvPr id="4" name="TextBox 3"/>
+          <p:cNvSpPr txBox="1"/>
+          <p:nvPr/>
+        </p:nvSpPr>
+        <p:spPr>
+          <a:xfrm>
+            <a:off x="658368" y="1600200"/>
+            <a:ext cx="10881360" cy="2651760"/>
+          </a:xfrm>
+          <a:prstGeom prst="rect">
+            <a:avLst/>
+          </a:prstGeom>
+          <a:noFill/>
+        </p:spPr>
+        <p:txBody>
+          <a:bodyPr wrap="square">
+            <a:spAutoFit/>
+          </a:bodyPr>
+          <a:lstStyle/>
+          <a:p>
+            <a:pPr>
+              <a:spcAft>
+                <a:spcPts val="1200"/>
+              </a:spcAft>
+            </a:pPr>
+            <a:r>
+              <a:rPr sz="2000" b="0" i="0">
+                <a:solidFill>
+                  <a:srgbClr val="1A1A1A"/>
+                </a:solidFill>
+                <a:latin typeface="Arial"/>
+              </a:rPr>
+              <a:t>Name a body a regulatory agency, and you expect a licensing capability, a register of the regulated, an enforcement record, and an appeals process. You walk in confirming or correcting a profile — not building one from nothing.</a:t>
+            </a:r>
+          </a:p>
+          <a:p>
+            <a:pPr>
+              <a:spcAft>
+                <a:spcPts val="1200"/>
+              </a:spcAft>
+            </a:pPr>
+            <a:r>
+              <a:rPr sz="2000" b="0" i="0">
+                <a:solidFill>
+                  <a:srgbClr val="1A1A1A"/>
+                </a:solidFill>
+                <a:latin typeface="Arial"/>
+              </a:rPr>
+              <a:t>When a body that should be a neutral registry is acting like a policy unit and shaping rules to suit itself, the taxonomy is what lets you see it.</a:t>
+            </a:r>
+          </a:p>
+        </p:txBody>
+      </p:sp>
+      <p:sp>
+        <p:nvSpPr>
+          <p:cNvPr id="5" name="Rounded Rectangle 4"/>
+          <p:cNvSpPr/>
+          <p:nvPr/>
+        </p:nvSpPr>
+        <p:spPr>
+          <a:xfrm>
+            <a:off x="658368" y="4434840"/>
+            <a:ext cx="10881360" cy="1325880"/>
+          </a:xfrm>
+          <a:prstGeom prst="roundRect">
+            <a:avLst>
+              <a:gd name="adj" fmla="val 4500"/>
+            </a:avLst>
+          </a:prstGeom>
+          <a:solidFill>
+            <a:srgbClr val="009CD6"/>
+          </a:solidFill>
+          <a:ln>
+            <a:noFill/>
+          </a:ln>
+          <a:effectLst/>
+        </p:spPr>
+        <p:style>
+          <a:lnRef idx="1">
+            <a:schemeClr val="accent1"/>
+          </a:lnRef>
+          <a:fillRef idx="3">
+            <a:schemeClr val="accent1"/>
+          </a:fillRef>
+          <a:effectRef idx="2">
+            <a:schemeClr val="accent1"/>
+          </a:effectRef>
+          <a:fontRef idx="minor">
+            <a:schemeClr val="lt1"/>
+          </a:fontRef>
+        </p:style>
+        <p:txBody>
+          <a:bodyPr rtlCol="0" anchor="ctr"/>
+          <a:lstStyle/>
+          <a:p>
+            <a:pPr algn="ctr"/>
+          </a:p>
+        </p:txBody>
+      </p:sp>
+      <p:sp>
+        <p:nvSpPr>
+          <p:cNvPr id="6" name="TextBox 5"/>
+          <p:cNvSpPr txBox="1"/>
+          <p:nvPr/>
+        </p:nvSpPr>
+        <p:spPr>
+          <a:xfrm>
+            <a:off x="859536" y="4626864"/>
+            <a:ext cx="10479024" cy="1051560"/>
+          </a:xfrm>
+          <a:prstGeom prst="rect">
+            <a:avLst/>
+          </a:prstGeom>
+          <a:noFill/>
+        </p:spPr>
+        <p:txBody>
+          <a:bodyPr wrap="square">
+            <a:spAutoFit/>
+          </a:bodyPr>
+          <a:lstStyle/>
+          <a:p>
+            <a:pPr>
+              <a:spcAft>
+                <a:spcPts val="700"/>
+              </a:spcAft>
+            </a:pPr>
+            <a:r>
+              <a:rPr sz="2300" b="1" i="0">
+                <a:solidFill>
+                  <a:srgbClr val="FFFFFF"/>
+                </a:solidFill>
+                <a:latin typeface="Arial"/>
+              </a:rPr>
+              <a:t>Misclassification is itself a finding.</a:t>
+            </a:r>
+          </a:p>
+        </p:txBody>
+      </p:sp>
+      <p:sp>
+        <p:nvSpPr>
+          <p:cNvPr id="7" name="TextBox 6"/>
+          <p:cNvSpPr txBox="1"/>
+          <p:nvPr/>
+        </p:nvSpPr>
+        <p:spPr>
+          <a:xfrm>
+            <a:off x="457200" y="6473952"/>
+            <a:ext cx="7772400" cy="292608"/>
+          </a:xfrm>
+          <a:prstGeom prst="rect">
+            <a:avLst/>
+          </a:prstGeom>
+          <a:noFill/>
+        </p:spPr>
+        <p:txBody>
+          <a:bodyPr wrap="square">
+            <a:spAutoFit/>
+          </a:bodyPr>
+          <a:lstStyle/>
+          <a:p>
+            <a:r>
+              <a:rPr sz="900" b="0" i="0">
+                <a:solidFill>
+                  <a:srgbClr val="595959"/>
+                </a:solidFill>
+                <a:latin typeface="Arial"/>
+              </a:rPr>
+              <a:t>2.4 · Classify any public body before you model it</a:t>
+            </a:r>
+          </a:p>
+        </p:txBody>
+      </p:sp>
+    </p:spTree>
+  </p:cSld>
+  <p:clrMapOvr>
+    <a:masterClrMapping/>
+  </p:clrMapOvr>
+</p:sld>
+</file>
+
+<file path=ppt/slides/slide33.xml><?xml version="1.0" encoding="utf-8"?>
+<p:sld xmlns:a="http://schemas.openxmlformats.org/drawingml/2006/main" xmlns:p="http://schemas.openxmlformats.org/presentationml/2006/main" xmlns:r="http://schemas.openxmlformats.org/officeDocument/2006/relationships">
+  <p:cSld>
+    <p:spTree>
+      <p:nvGrpSpPr>
+        <p:cNvPr id="1" name=""/>
+        <p:cNvGrpSpPr/>
+        <p:nvPr/>
+      </p:nvGrpSpPr>
+      <p:grpSpPr/>
+      <p:sp>
+        <p:nvSpPr>
+          <p:cNvPr id="2" name="Rectangle 1"/>
+          <p:cNvSpPr/>
+          <p:nvPr/>
+        </p:nvSpPr>
+        <p:spPr>
+          <a:xfrm>
+            <a:off x="457200" y="384048"/>
+            <a:ext cx="45720" cy="256032"/>
+          </a:xfrm>
+          <a:prstGeom prst="rect">
+            <a:avLst/>
+          </a:prstGeom>
+          <a:solidFill>
+            <a:srgbClr val="009CD6"/>
+          </a:solidFill>
+          <a:ln>
+            <a:noFill/>
+          </a:ln>
+          <a:effectLst/>
+        </p:spPr>
+        <p:style>
+          <a:lnRef idx="1">
+            <a:schemeClr val="accent1"/>
+          </a:lnRef>
+          <a:fillRef idx="3">
+            <a:schemeClr val="accent1"/>
+          </a:fillRef>
+          <a:effectRef idx="2">
+            <a:schemeClr val="accent1"/>
+          </a:effectRef>
+          <a:fontRef idx="minor">
+            <a:schemeClr val="lt1"/>
+          </a:fontRef>
+        </p:style>
+        <p:txBody>
+          <a:bodyPr rtlCol="0" anchor="ctr"/>
+          <a:lstStyle/>
+          <a:p>
+            <a:pPr algn="ctr"/>
+          </a:p>
+        </p:txBody>
+      </p:sp>
+      <p:sp>
+        <p:nvSpPr>
+          <p:cNvPr id="3" name="TextBox 2"/>
+          <p:cNvSpPr txBox="1"/>
+          <p:nvPr/>
+        </p:nvSpPr>
+        <p:spPr>
+          <a:xfrm>
+            <a:off x="621792" y="274320"/>
+            <a:ext cx="11247120" cy="914400"/>
+          </a:xfrm>
+          <a:prstGeom prst="rect">
+            <a:avLst/>
+          </a:prstGeom>
+          <a:noFill/>
+        </p:spPr>
+        <p:txBody>
+          <a:bodyPr wrap="square">
+            <a:spAutoFit/>
+          </a:bodyPr>
+          <a:lstStyle/>
+          <a:p>
+            <a:r>
+              <a:rPr sz="2800" b="1" i="0">
+                <a:solidFill>
+                  <a:srgbClr val="1A1A1A"/>
+                </a:solidFill>
+                <a:latin typeface="Arial"/>
+              </a:rPr>
+              <a:t>It is already published — adopt it</a:t>
+            </a:r>
+          </a:p>
+        </p:txBody>
+      </p:sp>
+      <p:sp>
+        <p:nvSpPr>
+          <p:cNvPr id="4" name="TextBox 3"/>
+          <p:cNvSpPr txBox="1"/>
+          <p:nvPr/>
+        </p:nvSpPr>
+        <p:spPr>
+          <a:xfrm>
+            <a:off x="658368" y="1554480"/>
+            <a:ext cx="10984687" cy="1188720"/>
+          </a:xfrm>
+          <a:prstGeom prst="rect">
+            <a:avLst/>
+          </a:prstGeom>
+          <a:noFill/>
+        </p:spPr>
+        <p:txBody>
+          <a:bodyPr wrap="square">
+            <a:spAutoFit/>
+          </a:bodyPr>
+          <a:lstStyle/>
+          <a:p>
+            <a:pPr>
+              <a:spcAft>
+                <a:spcPts val="300"/>
+              </a:spcAft>
+            </a:pPr>
+            <a:r>
+              <a:rPr sz="1900" b="1" i="0">
+                <a:solidFill>
+                  <a:srgbClr val="1A1A1A"/>
+                </a:solidFill>
+                <a:latin typeface="Arial"/>
+              </a:rPr>
+              <a:t>PAERA §4.6, with the detail in Annex A1.2</a:t>
+            </a:r>
+          </a:p>
+          <a:p>
+            <a:pPr>
+              <a:spcAft>
+                <a:spcPts val="300"/>
+              </a:spcAft>
+            </a:pPr>
+            <a:r>
+              <a:rPr sz="1550" b="0" i="0">
+                <a:solidFill>
+                  <a:srgbClr val="595959"/>
+                </a:solidFill>
+                <a:latin typeface="Arial"/>
+              </a:rPr>
+              <a:t>You do not invent a classification scheme for your country.</a:t>
+            </a:r>
+          </a:p>
+        </p:txBody>
+      </p:sp>
+      <p:sp>
+        <p:nvSpPr>
+          <p:cNvPr id="5" name="Rectangle 4"/>
+          <p:cNvSpPr/>
+          <p:nvPr/>
+        </p:nvSpPr>
+        <p:spPr>
+          <a:xfrm>
+            <a:off x="621792" y="2747772"/>
+            <a:ext cx="10881360" cy="12700"/>
+          </a:xfrm>
+          <a:prstGeom prst="rect">
+            <a:avLst/>
+          </a:prstGeom>
+          <a:solidFill>
+            <a:srgbClr val="DDECF4"/>
+          </a:solidFill>
+          <a:ln>
+            <a:noFill/>
+          </a:ln>
+          <a:effectLst/>
+        </p:spPr>
+        <p:style>
+          <a:lnRef idx="1">
+            <a:schemeClr val="accent1"/>
+          </a:lnRef>
+          <a:fillRef idx="3">
+            <a:schemeClr val="accent1"/>
+          </a:fillRef>
+          <a:effectRef idx="2">
+            <a:schemeClr val="accent1"/>
+          </a:effectRef>
+          <a:fontRef idx="minor">
+            <a:schemeClr val="lt1"/>
+          </a:fontRef>
+        </p:style>
+        <p:txBody>
+          <a:bodyPr rtlCol="0" anchor="ctr"/>
+          <a:lstStyle/>
+          <a:p>
+            <a:pPr algn="ctr"/>
+          </a:p>
+        </p:txBody>
+      </p:sp>
+      <p:sp>
+        <p:nvSpPr>
+          <p:cNvPr id="6" name="TextBox 5"/>
+          <p:cNvSpPr txBox="1"/>
+          <p:nvPr/>
+        </p:nvSpPr>
+        <p:spPr>
+          <a:xfrm>
+            <a:off x="658368" y="2788920"/>
+            <a:ext cx="10984687" cy="1188720"/>
+          </a:xfrm>
+          <a:prstGeom prst="rect">
+            <a:avLst/>
+          </a:prstGeom>
+          <a:noFill/>
+        </p:spPr>
+        <p:txBody>
+          <a:bodyPr wrap="square">
+            <a:spAutoFit/>
+          </a:bodyPr>
+          <a:lstStyle/>
+          <a:p>
+            <a:pPr>
+              <a:spcAft>
+                <a:spcPts val="300"/>
+              </a:spcAft>
+            </a:pPr>
+            <a:r>
+              <a:rPr sz="1900" b="1" i="0">
+                <a:solidFill>
+                  <a:srgbClr val="1A1A1A"/>
+                </a:solidFill>
+                <a:latin typeface="Arial"/>
+              </a:rPr>
+              <a:t>Extend it only where your country has a body type it genuinely does not cover</a:t>
+            </a:r>
+          </a:p>
+          <a:p>
+            <a:pPr>
+              <a:spcAft>
+                <a:spcPts val="300"/>
+              </a:spcAft>
+            </a:pPr>
+            <a:r>
+              <a:rPr sz="1550" b="0" i="0">
+                <a:solidFill>
+                  <a:srgbClr val="595959"/>
+                </a:solidFill>
+                <a:latin typeface="Arial"/>
+              </a:rPr>
+              <a:t>When you say “service-delivery authority”, every other architect in the country pictures the same thing.</a:t>
+            </a:r>
+          </a:p>
+        </p:txBody>
+      </p:sp>
+      <p:sp>
+        <p:nvSpPr>
+          <p:cNvPr id="7" name="TextBox 6"/>
+          <p:cNvSpPr txBox="1"/>
+          <p:nvPr/>
+        </p:nvSpPr>
+        <p:spPr>
+          <a:xfrm>
+            <a:off x="457200" y="6473952"/>
+            <a:ext cx="7772400" cy="292608"/>
+          </a:xfrm>
+          <a:prstGeom prst="rect">
+            <a:avLst/>
+          </a:prstGeom>
+          <a:noFill/>
+        </p:spPr>
+        <p:txBody>
+          <a:bodyPr wrap="square">
+            <a:spAutoFit/>
+          </a:bodyPr>
+          <a:lstStyle/>
+          <a:p>
+            <a:r>
+              <a:rPr sz="900" b="0" i="0">
+                <a:solidFill>
+                  <a:srgbClr val="595959"/>
+                </a:solidFill>
+                <a:latin typeface="Arial"/>
+              </a:rPr>
+              <a:t>2.4 · Classify any public body before you model it</a:t>
+            </a:r>
+          </a:p>
+        </p:txBody>
+      </p:sp>
+    </p:spTree>
+  </p:cSld>
+  <p:clrMapOvr>
+    <a:masterClrMapping/>
+  </p:clrMapOvr>
+</p:sld>
+</file>
+
+<file path=ppt/slides/slide34.xml><?xml version="1.0" encoding="utf-8"?>
 <p:sld xmlns:a="http://schemas.openxmlformats.org/drawingml/2006/main" xmlns:p="http://schemas.openxmlformats.org/presentationml/2006/main" xmlns:r="http://schemas.openxmlformats.org/officeDocument/2006/relationships">
   <p:cSld>
     <p:spTree>
@@ -14225,7 +13778,7 @@
 </p:sld>
 </file>
 
-<file path=ppt/slides/slide31.xml><?xml version="1.0" encoding="utf-8"?>
+<file path=ppt/slides/slide35.xml><?xml version="1.0" encoding="utf-8"?>
 <p:sld xmlns:a="http://schemas.openxmlformats.org/drawingml/2006/main" xmlns:p="http://schemas.openxmlformats.org/presentationml/2006/main" xmlns:r="http://schemas.openxmlformats.org/officeDocument/2006/relationships">
   <p:cSld>
     <p:spTree>

--- a/10-Knowledge-Products/KP1-GEA/videos/module_2/en/decks/KP1_M2_2.4_Deck_v0.2.pptx
+++ b/10-Knowledge-Products/KP1-GEA/videos/module_2/en/decks/KP1_M2_2.4_Deck_v0.2.pptx
@@ -11765,7 +11765,7 @@
                 </a:solidFill>
                 <a:latin typeface="Arial"/>
               </a:rPr>
-              <a:t>~4 minutes · standalone video · voice-over on text slides</a:t>
+              <a:t>standalone video · voice-over on text slides</a:t>
             </a:r>
           </a:p>
         </p:txBody>

--- a/10-Knowledge-Products/KP1-GEA/videos/module_2/en/decks/KP1_M2_2.4_Deck_v0.2.pptx
+++ b/10-Knowledge-Products/KP1-GEA/videos/module_2/en/decks/KP1_M2_2.4_Deck_v0.2.pptx
@@ -11629,7 +11629,7 @@
                 </a:solidFill>
                 <a:latin typeface="Arial"/>
               </a:rPr>
-              <a:t>KP1 · MODULE 2 · VIDEO 2.4</a:t>
+              <a:t>MODULE 2 · VIDEO 2.4</a:t>
             </a:r>
           </a:p>
         </p:txBody>
